--- a/Dossier d'analyse 2.pptx
+++ b/Dossier d'analyse 2.pptx
@@ -217,7 +217,7 @@
           <a:p>
             <a:fld id="{FC6F517D-CE64-462C-AD75-344A9B99B847}" type="datetimeFigureOut">
               <a:rPr lang="fr-CM" smtClean="0"/>
-              <a:t>17/01/2026</a:t>
+              <a:t>23/01/2026</a:t>
             </a:fld>
             <a:endParaRPr lang="fr-CM"/>
           </a:p>
@@ -824,7 +824,7 @@
           <a:p>
             <a:fld id="{9A2ADD78-B297-491E-B195-029A9672D6CB}" type="datetimeFigureOut">
               <a:rPr lang="fr-FR" smtClean="0"/>
-              <a:t>17/01/2026</a:t>
+              <a:t>23/01/2026</a:t>
             </a:fld>
             <a:endParaRPr lang="fr-FR"/>
           </a:p>
@@ -1136,7 +1136,7 @@
           <a:p>
             <a:fld id="{9A2ADD78-B297-491E-B195-029A9672D6CB}" type="datetimeFigureOut">
               <a:rPr lang="fr-FR" smtClean="0"/>
-              <a:t>17/01/2026</a:t>
+              <a:t>23/01/2026</a:t>
             </a:fld>
             <a:endParaRPr lang="fr-FR"/>
           </a:p>
@@ -1358,7 +1358,7 @@
           <a:p>
             <a:fld id="{9A2ADD78-B297-491E-B195-029A9672D6CB}" type="datetimeFigureOut">
               <a:rPr lang="fr-FR" smtClean="0"/>
-              <a:t>17/01/2026</a:t>
+              <a:t>23/01/2026</a:t>
             </a:fld>
             <a:endParaRPr lang="fr-FR"/>
           </a:p>
@@ -1649,7 +1649,7 @@
           <a:p>
             <a:fld id="{9A2ADD78-B297-491E-B195-029A9672D6CB}" type="datetimeFigureOut">
               <a:rPr lang="fr-FR" smtClean="0"/>
-              <a:t>17/01/2026</a:t>
+              <a:t>23/01/2026</a:t>
             </a:fld>
             <a:endParaRPr lang="fr-FR"/>
           </a:p>
@@ -2103,7 +2103,7 @@
           <a:p>
             <a:fld id="{9A2ADD78-B297-491E-B195-029A9672D6CB}" type="datetimeFigureOut">
               <a:rPr lang="fr-FR" smtClean="0"/>
-              <a:t>17/01/2026</a:t>
+              <a:t>23/01/2026</a:t>
             </a:fld>
             <a:endParaRPr lang="fr-FR"/>
           </a:p>
@@ -2679,7 +2679,7 @@
           <a:p>
             <a:fld id="{9A2ADD78-B297-491E-B195-029A9672D6CB}" type="datetimeFigureOut">
               <a:rPr lang="fr-FR" smtClean="0"/>
-              <a:t>17/01/2026</a:t>
+              <a:t>23/01/2026</a:t>
             </a:fld>
             <a:endParaRPr lang="fr-FR"/>
           </a:p>
@@ -3531,7 +3531,7 @@
           <a:p>
             <a:fld id="{9A2ADD78-B297-491E-B195-029A9672D6CB}" type="datetimeFigureOut">
               <a:rPr lang="fr-FR" smtClean="0"/>
-              <a:t>17/01/2026</a:t>
+              <a:t>23/01/2026</a:t>
             </a:fld>
             <a:endParaRPr lang="fr-FR"/>
           </a:p>
@@ -3736,7 +3736,7 @@
           <a:p>
             <a:fld id="{9A2ADD78-B297-491E-B195-029A9672D6CB}" type="datetimeFigureOut">
               <a:rPr lang="fr-FR" smtClean="0"/>
-              <a:t>17/01/2026</a:t>
+              <a:t>23/01/2026</a:t>
             </a:fld>
             <a:endParaRPr lang="fr-FR"/>
           </a:p>
@@ -3950,7 +3950,7 @@
           <a:p>
             <a:fld id="{9A2ADD78-B297-491E-B195-029A9672D6CB}" type="datetimeFigureOut">
               <a:rPr lang="fr-FR" smtClean="0"/>
-              <a:t>17/01/2026</a:t>
+              <a:t>23/01/2026</a:t>
             </a:fld>
             <a:endParaRPr lang="fr-FR"/>
           </a:p>
@@ -4155,7 +4155,7 @@
           <a:p>
             <a:fld id="{9A2ADD78-B297-491E-B195-029A9672D6CB}" type="datetimeFigureOut">
               <a:rPr lang="fr-FR" smtClean="0"/>
-              <a:t>17/01/2026</a:t>
+              <a:t>23/01/2026</a:t>
             </a:fld>
             <a:endParaRPr lang="fr-FR"/>
           </a:p>
@@ -4435,7 +4435,7 @@
           <a:p>
             <a:fld id="{9A2ADD78-B297-491E-B195-029A9672D6CB}" type="datetimeFigureOut">
               <a:rPr lang="fr-FR" smtClean="0"/>
-              <a:t>17/01/2026</a:t>
+              <a:t>23/01/2026</a:t>
             </a:fld>
             <a:endParaRPr lang="fr-FR"/>
           </a:p>
@@ -4702,7 +4702,7 @@
           <a:p>
             <a:fld id="{9A2ADD78-B297-491E-B195-029A9672D6CB}" type="datetimeFigureOut">
               <a:rPr lang="fr-FR" smtClean="0"/>
-              <a:t>17/01/2026</a:t>
+              <a:t>23/01/2026</a:t>
             </a:fld>
             <a:endParaRPr lang="fr-FR"/>
           </a:p>
@@ -5117,7 +5117,7 @@
           <a:p>
             <a:fld id="{9A2ADD78-B297-491E-B195-029A9672D6CB}" type="datetimeFigureOut">
               <a:rPr lang="fr-FR" smtClean="0"/>
-              <a:t>17/01/2026</a:t>
+              <a:t>23/01/2026</a:t>
             </a:fld>
             <a:endParaRPr lang="fr-FR"/>
           </a:p>
@@ -5265,7 +5265,7 @@
           <a:p>
             <a:fld id="{9A2ADD78-B297-491E-B195-029A9672D6CB}" type="datetimeFigureOut">
               <a:rPr lang="fr-FR" smtClean="0"/>
-              <a:t>17/01/2026</a:t>
+              <a:t>23/01/2026</a:t>
             </a:fld>
             <a:endParaRPr lang="fr-FR"/>
           </a:p>
@@ -5390,7 +5390,7 @@
           <a:p>
             <a:fld id="{9A2ADD78-B297-491E-B195-029A9672D6CB}" type="datetimeFigureOut">
               <a:rPr lang="fr-FR" smtClean="0"/>
-              <a:t>17/01/2026</a:t>
+              <a:t>23/01/2026</a:t>
             </a:fld>
             <a:endParaRPr lang="fr-FR"/>
           </a:p>
@@ -5669,7 +5669,7 @@
           <a:p>
             <a:fld id="{9A2ADD78-B297-491E-B195-029A9672D6CB}" type="datetimeFigureOut">
               <a:rPr lang="fr-FR" smtClean="0"/>
-              <a:t>17/01/2026</a:t>
+              <a:t>23/01/2026</a:t>
             </a:fld>
             <a:endParaRPr lang="fr-FR"/>
           </a:p>
@@ -5981,7 +5981,7 @@
           <a:p>
             <a:fld id="{9A2ADD78-B297-491E-B195-029A9672D6CB}" type="datetimeFigureOut">
               <a:rPr lang="fr-FR" smtClean="0"/>
-              <a:t>17/01/2026</a:t>
+              <a:t>23/01/2026</a:t>
             </a:fld>
             <a:endParaRPr lang="fr-FR"/>
           </a:p>
@@ -6234,7 +6234,7 @@
           <a:p>
             <a:fld id="{9A2ADD78-B297-491E-B195-029A9672D6CB}" type="datetimeFigureOut">
               <a:rPr lang="fr-FR" smtClean="0"/>
-              <a:t>17/01/2026</a:t>
+              <a:t>23/01/2026</a:t>
             </a:fld>
             <a:endParaRPr lang="fr-FR"/>
           </a:p>
@@ -7151,10 +7151,18 @@
               </a:lnSpc>
             </a:pPr>
             <a:r>
-              <a:rPr lang="en-US" dirty="0" smtClean="0"/>
+              <a:rPr lang="en-US" dirty="0" smtClean="0">
+                <a:effectLst/>
+                <a:latin typeface="Times New Roman" panose="02020603050405020304" pitchFamily="18" charset="0"/>
+                <a:cs typeface="Times New Roman" panose="02020603050405020304" pitchFamily="18" charset="0"/>
+              </a:rPr>
               <a:t>III. ACTEURS ET CAS D’UTILISATION</a:t>
             </a:r>
-            <a:endParaRPr lang="fr-FR" dirty="0"/>
+            <a:endParaRPr lang="fr-FR" dirty="0">
+              <a:effectLst/>
+              <a:latin typeface="Times New Roman" panose="02020603050405020304" pitchFamily="18" charset="0"/>
+              <a:cs typeface="Times New Roman" panose="02020603050405020304" pitchFamily="18" charset="0"/>
+            </a:endParaRPr>
           </a:p>
         </p:txBody>
       </p:sp>
@@ -7185,7 +7193,10 @@
               <a:buAutoNum type="arabicPeriod"/>
             </a:pPr>
             <a:r>
-              <a:rPr lang="fr-CM" b="1" dirty="0" smtClean="0"/>
+              <a:rPr lang="fr-CM" b="1" dirty="0" smtClean="0">
+                <a:latin typeface="Times New Roman" panose="02020603050405020304" pitchFamily="18" charset="0"/>
+                <a:cs typeface="Times New Roman" panose="02020603050405020304" pitchFamily="18" charset="0"/>
+              </a:rPr>
               <a:t>Administrateur du système (acteur principal):</a:t>
             </a:r>
           </a:p>
@@ -7560,8 +7571,8 @@
         </p:nvSpPr>
         <p:spPr>
           <a:xfrm>
-            <a:off x="6143784" y="717388"/>
-            <a:ext cx="6096000" cy="4385816"/>
+            <a:off x="5853084" y="717388"/>
+            <a:ext cx="6096000" cy="3920560"/>
           </a:xfrm>
           <a:prstGeom prst="rect">
             <a:avLst/>
@@ -7574,12 +7585,18 @@
           <a:lstStyle/>
           <a:p>
             <a:r>
-              <a:rPr lang="fr-FR" b="1" dirty="0" smtClean="0"/>
+              <a:rPr lang="fr-FR" b="1" dirty="0" smtClean="0">
+                <a:latin typeface="Times New Roman" panose="02020603050405020304" pitchFamily="18" charset="0"/>
+                <a:cs typeface="Times New Roman" panose="02020603050405020304" pitchFamily="18" charset="0"/>
+              </a:rPr>
               <a:t>2. Utilisateur (acteur principal):</a:t>
             </a:r>
           </a:p>
           <a:p>
-            <a:endParaRPr lang="fr-FR" b="1" dirty="0" smtClean="0"/>
+            <a:endParaRPr lang="fr-FR" b="1" dirty="0" smtClean="0">
+              <a:latin typeface="Times New Roman" panose="02020603050405020304" pitchFamily="18" charset="0"/>
+              <a:cs typeface="Times New Roman" panose="02020603050405020304" pitchFamily="18" charset="0"/>
+            </a:endParaRPr>
           </a:p>
           <a:p>
             <a:pPr>
@@ -7588,10 +7605,16 @@
               </a:lnSpc>
             </a:pPr>
             <a:r>
-              <a:rPr lang="fr-FR" b="1" dirty="0" smtClean="0"/>
+              <a:rPr lang="fr-FR" b="1" dirty="0" smtClean="0">
+                <a:latin typeface="Times New Roman" panose="02020603050405020304" pitchFamily="18" charset="0"/>
+                <a:cs typeface="Times New Roman" panose="02020603050405020304" pitchFamily="18" charset="0"/>
+              </a:rPr>
               <a:t>a) Consulter </a:t>
             </a:r>
-            <a:endParaRPr lang="fr-FR" b="1" dirty="0"/>
+            <a:endParaRPr lang="fr-FR" b="1" dirty="0">
+              <a:latin typeface="Times New Roman" panose="02020603050405020304" pitchFamily="18" charset="0"/>
+              <a:cs typeface="Times New Roman" panose="02020603050405020304" pitchFamily="18" charset="0"/>
+            </a:endParaRPr>
           </a:p>
           <a:p>
             <a:pPr>
@@ -7602,11 +7625,17 @@
               <a:buChar char="•"/>
             </a:pPr>
             <a:r>
-              <a:rPr lang="fr-FR" b="1" dirty="0"/>
+              <a:rPr lang="fr-FR" b="1" dirty="0">
+                <a:latin typeface="Times New Roman" panose="02020603050405020304" pitchFamily="18" charset="0"/>
+                <a:cs typeface="Times New Roman" panose="02020603050405020304" pitchFamily="18" charset="0"/>
+              </a:rPr>
               <a:t>Visualiser le tableau de bord :</a:t>
             </a:r>
             <a:r>
-              <a:rPr lang="fr-FR" dirty="0"/>
+              <a:rPr lang="fr-FR" dirty="0">
+                <a:latin typeface="Times New Roman" panose="02020603050405020304" pitchFamily="18" charset="0"/>
+                <a:cs typeface="Times New Roman" panose="02020603050405020304" pitchFamily="18" charset="0"/>
+              </a:rPr>
               <a:t> Consulter la charge globale et individuelle des cœurs en temps réel.</a:t>
             </a:r>
           </a:p>
@@ -7619,11 +7648,17 @@
               <a:buChar char="•"/>
             </a:pPr>
             <a:r>
-              <a:rPr lang="fr-FR" b="1" dirty="0"/>
+              <a:rPr lang="fr-FR" b="1" dirty="0">
+                <a:latin typeface="Times New Roman" panose="02020603050405020304" pitchFamily="18" charset="0"/>
+                <a:cs typeface="Times New Roman" panose="02020603050405020304" pitchFamily="18" charset="0"/>
+              </a:rPr>
               <a:t>Surveiller les températures :</a:t>
             </a:r>
             <a:r>
-              <a:rPr lang="fr-FR" dirty="0"/>
+              <a:rPr lang="fr-FR" dirty="0">
+                <a:latin typeface="Times New Roman" panose="02020603050405020304" pitchFamily="18" charset="0"/>
+                <a:cs typeface="Times New Roman" panose="02020603050405020304" pitchFamily="18" charset="0"/>
+              </a:rPr>
               <a:t> Vérifier que son activité n'entraîne pas une surchauffe du processeur.</a:t>
             </a:r>
           </a:p>
@@ -7636,23 +7671,38 @@
               <a:buChar char="•"/>
             </a:pPr>
             <a:r>
-              <a:rPr lang="fr-FR" b="1" dirty="0"/>
+              <a:rPr lang="fr-FR" b="1" dirty="0">
+                <a:latin typeface="Times New Roman" panose="02020603050405020304" pitchFamily="18" charset="0"/>
+                <a:cs typeface="Times New Roman" panose="02020603050405020304" pitchFamily="18" charset="0"/>
+              </a:rPr>
               <a:t>Consulter les fréquences :</a:t>
             </a:r>
             <a:r>
-              <a:rPr lang="fr-FR" dirty="0"/>
+              <a:rPr lang="fr-FR" dirty="0">
+                <a:latin typeface="Times New Roman" panose="02020603050405020304" pitchFamily="18" charset="0"/>
+                <a:cs typeface="Times New Roman" panose="02020603050405020304" pitchFamily="18" charset="0"/>
+              </a:rPr>
               <a:t> Vérifier si le processeur tourne à sa vitesse maximale (mode </a:t>
             </a:r>
             <a:r>
-              <a:rPr lang="fr-FR" dirty="0" err="1"/>
+              <a:rPr lang="fr-FR" dirty="0" err="1">
+                <a:latin typeface="Times New Roman" panose="02020603050405020304" pitchFamily="18" charset="0"/>
+                <a:cs typeface="Times New Roman" panose="02020603050405020304" pitchFamily="18" charset="0"/>
+              </a:rPr>
               <a:t>Boost</a:t>
             </a:r>
             <a:r>
-              <a:rPr lang="fr-FR" dirty="0"/>
+              <a:rPr lang="fr-FR" dirty="0">
+                <a:latin typeface="Times New Roman" panose="02020603050405020304" pitchFamily="18" charset="0"/>
+                <a:cs typeface="Times New Roman" panose="02020603050405020304" pitchFamily="18" charset="0"/>
+              </a:rPr>
               <a:t>) ou s'il est bridé</a:t>
             </a:r>
             <a:r>
-              <a:rPr lang="fr-FR" dirty="0" smtClean="0"/>
+              <a:rPr lang="fr-FR" dirty="0" smtClean="0">
+                <a:latin typeface="Times New Roman" panose="02020603050405020304" pitchFamily="18" charset="0"/>
+                <a:cs typeface="Times New Roman" panose="02020603050405020304" pitchFamily="18" charset="0"/>
+              </a:rPr>
               <a:t>.</a:t>
             </a:r>
           </a:p>
@@ -7706,7 +7756,10 @@
               </a:rPr>
               <a:t>surveiller</a:t>
             </a:r>
-            <a:endParaRPr lang="fr-FR" dirty="0"/>
+            <a:endParaRPr lang="fr-FR" dirty="0">
+              <a:latin typeface="Times New Roman" panose="02020603050405020304" pitchFamily="18" charset="0"/>
+              <a:cs typeface="Times New Roman" panose="02020603050405020304" pitchFamily="18" charset="0"/>
+            </a:endParaRPr>
           </a:p>
         </p:txBody>
       </p:sp>
@@ -8135,10 +8188,18 @@
               </a:lnSpc>
             </a:pPr>
             <a:r>
-              <a:rPr lang="en-US" dirty="0" smtClean="0"/>
+              <a:rPr lang="en-US" dirty="0" smtClean="0">
+                <a:effectLst/>
+                <a:latin typeface="Times New Roman" panose="02020603050405020304" pitchFamily="18" charset="0"/>
+                <a:cs typeface="Times New Roman" panose="02020603050405020304" pitchFamily="18" charset="0"/>
+              </a:rPr>
               <a:t>III. ACTEURS ET CAS D’UTILISATION</a:t>
             </a:r>
-            <a:endParaRPr lang="fr-FR" dirty="0"/>
+            <a:endParaRPr lang="fr-FR" dirty="0">
+              <a:effectLst/>
+              <a:latin typeface="Times New Roman" panose="02020603050405020304" pitchFamily="18" charset="0"/>
+              <a:cs typeface="Times New Roman" panose="02020603050405020304" pitchFamily="18" charset="0"/>
+            </a:endParaRPr>
           </a:p>
         </p:txBody>
       </p:sp>
@@ -9143,10 +9204,18 @@
               </a:lnSpc>
             </a:pPr>
             <a:r>
-              <a:rPr lang="en-US" sz="4400" dirty="0" smtClean="0"/>
+              <a:rPr lang="en-US" sz="4400" dirty="0" smtClean="0">
+                <a:effectLst/>
+                <a:latin typeface="Times New Roman" panose="02020603050405020304" pitchFamily="18" charset="0"/>
+                <a:cs typeface="Times New Roman" panose="02020603050405020304" pitchFamily="18" charset="0"/>
+              </a:rPr>
               <a:t>IV. DESCRIPTION TEXTUELLES</a:t>
             </a:r>
-            <a:endParaRPr lang="fr-FR" sz="4400" dirty="0"/>
+            <a:endParaRPr lang="fr-FR" sz="4400" dirty="0">
+              <a:effectLst/>
+              <a:latin typeface="Times New Roman" panose="02020603050405020304" pitchFamily="18" charset="0"/>
+              <a:cs typeface="Times New Roman" panose="02020603050405020304" pitchFamily="18" charset="0"/>
+            </a:endParaRPr>
           </a:p>
         </p:txBody>
       </p:sp>
@@ -9530,7 +9599,7 @@
         <p:spPr>
           <a:xfrm>
             <a:off x="914400" y="1328341"/>
-            <a:ext cx="10617200" cy="3362202"/>
+            <a:ext cx="10617200" cy="2951064"/>
           </a:xfrm>
           <a:prstGeom prst="rect">
             <a:avLst/>
@@ -9548,34 +9617,58 @@
               </a:lnSpc>
             </a:pPr>
             <a:r>
-              <a:rPr lang="fr-FR" dirty="0" smtClean="0"/>
+              <a:rPr lang="fr-FR" dirty="0" smtClean="0">
+                <a:latin typeface="Times New Roman" panose="02020603050405020304" pitchFamily="18" charset="0"/>
+                <a:cs typeface="Times New Roman" panose="02020603050405020304" pitchFamily="18" charset="0"/>
+              </a:rPr>
               <a:t>	Afin </a:t>
             </a:r>
             <a:r>
-              <a:rPr lang="fr-FR" dirty="0"/>
+              <a:rPr lang="fr-FR" dirty="0">
+                <a:latin typeface="Times New Roman" panose="02020603050405020304" pitchFamily="18" charset="0"/>
+                <a:cs typeface="Times New Roman" panose="02020603050405020304" pitchFamily="18" charset="0"/>
+              </a:rPr>
               <a:t>de préciser les interactions entre les acteurs et le système </a:t>
             </a:r>
             <a:r>
-              <a:rPr lang="fr-FR" b="1" dirty="0" err="1"/>
+              <a:rPr lang="fr-FR" b="1" dirty="0" err="1">
+                <a:latin typeface="Times New Roman" panose="02020603050405020304" pitchFamily="18" charset="0"/>
+                <a:cs typeface="Times New Roman" panose="02020603050405020304" pitchFamily="18" charset="0"/>
+              </a:rPr>
               <a:t>Multicore</a:t>
             </a:r>
             <a:r>
-              <a:rPr lang="fr-FR" b="1" dirty="0"/>
+              <a:rPr lang="fr-FR" b="1" dirty="0">
+                <a:latin typeface="Times New Roman" panose="02020603050405020304" pitchFamily="18" charset="0"/>
+                <a:cs typeface="Times New Roman" panose="02020603050405020304" pitchFamily="18" charset="0"/>
+              </a:rPr>
               <a:t> Monitor</a:t>
             </a:r>
             <a:r>
-              <a:rPr lang="fr-FR" dirty="0"/>
+              <a:rPr lang="fr-FR" dirty="0">
+                <a:latin typeface="Times New Roman" panose="02020603050405020304" pitchFamily="18" charset="0"/>
+                <a:cs typeface="Times New Roman" panose="02020603050405020304" pitchFamily="18" charset="0"/>
+              </a:rPr>
               <a:t>, cette section détaille les descriptions textuelles des cas d'utilisation. Alors que les diagrammes UML offrent une vue synthétique des fonctionnalités, ces descriptions permettent d'approfondir le comportement dynamique du logiciel en spécifiant les scénarios nominaux, les conditions préalables et les exceptions. Cette étape est cruciale pour anticiper les flux de données entre l'utilisateur et le noyau </a:t>
             </a:r>
             <a:r>
-              <a:rPr lang="fr-FR" b="1" dirty="0" err="1"/>
+              <a:rPr lang="fr-FR" b="1" dirty="0" err="1">
+                <a:latin typeface="Times New Roman" panose="02020603050405020304" pitchFamily="18" charset="0"/>
+                <a:cs typeface="Times New Roman" panose="02020603050405020304" pitchFamily="18" charset="0"/>
+              </a:rPr>
               <a:t>openSUSE</a:t>
             </a:r>
             <a:r>
-              <a:rPr lang="fr-FR" dirty="0"/>
+              <a:rPr lang="fr-FR" dirty="0">
+                <a:latin typeface="Times New Roman" panose="02020603050405020304" pitchFamily="18" charset="0"/>
+                <a:cs typeface="Times New Roman" panose="02020603050405020304" pitchFamily="18" charset="0"/>
+              </a:rPr>
               <a:t>, garantissant ainsi que chaque fonction, de la surveillance thermique à l'exportation des logs, soit implémentée avec la rigueur nécessaire aux systèmes temps réel.</a:t>
             </a:r>
-            <a:endParaRPr lang="fr-CM" dirty="0"/>
+            <a:endParaRPr lang="fr-CM" dirty="0">
+              <a:latin typeface="Times New Roman" panose="02020603050405020304" pitchFamily="18" charset="0"/>
+              <a:cs typeface="Times New Roman" panose="02020603050405020304" pitchFamily="18" charset="0"/>
+            </a:endParaRPr>
           </a:p>
         </p:txBody>
       </p:sp>
@@ -14072,14 +14165,14 @@
           <p:nvPr>
             <p:extLst>
               <p:ext uri="{D42A27DB-BD31-4B8C-83A1-F6EECF244321}">
-                <p14:modId xmlns:p14="http://schemas.microsoft.com/office/powerpoint/2010/main" val="547955877"/>
+                <p14:modId xmlns:p14="http://schemas.microsoft.com/office/powerpoint/2010/main" val="3300917132"/>
               </p:ext>
             </p:extLst>
           </p:nvPr>
         </p:nvGraphicFramePr>
         <p:xfrm>
           <a:off x="193963" y="233678"/>
-          <a:ext cx="11757892" cy="5974617"/>
+          <a:ext cx="11757892" cy="5977192"/>
         </p:xfrm>
         <a:graphic>
           <a:graphicData uri="http://schemas.openxmlformats.org/drawingml/2006/table">
@@ -14118,20 +14211,24 @@
                         </a:spcAft>
                       </a:pPr>
                       <a:r>
-                        <a:rPr lang="en-US" sz="900" dirty="0">
+                        <a:rPr lang="en-US" sz="1200" dirty="0">
                           <a:effectLst/>
+                          <a:latin typeface="Times New Roman" panose="02020603050405020304" pitchFamily="18" charset="0"/>
+                          <a:cs typeface="Times New Roman" panose="02020603050405020304" pitchFamily="18" charset="0"/>
                         </a:rPr>
                         <a:t>Nom du </a:t>
                       </a:r>
                       <a:r>
-                        <a:rPr lang="en-US" sz="900" dirty="0" err="1">
+                        <a:rPr lang="en-US" sz="1200" dirty="0" err="1">
                           <a:effectLst/>
+                          <a:latin typeface="Times New Roman" panose="02020603050405020304" pitchFamily="18" charset="0"/>
+                          <a:cs typeface="Times New Roman" panose="02020603050405020304" pitchFamily="18" charset="0"/>
                         </a:rPr>
                         <a:t>Cas</a:t>
                       </a:r>
-                      <a:endParaRPr lang="en-US" sz="900" dirty="0">
+                      <a:endParaRPr lang="en-US" sz="1200" dirty="0">
                         <a:effectLst/>
-                        <a:latin typeface="Calibri" panose="020F0502020204030204" pitchFamily="34" charset="0"/>
+                        <a:latin typeface="Times New Roman" panose="02020603050405020304" pitchFamily="18" charset="0"/>
                         <a:ea typeface="Calibri" panose="020F0502020204030204" pitchFamily="34" charset="0"/>
                         <a:cs typeface="Times New Roman" panose="02020603050405020304" pitchFamily="18" charset="0"/>
                       </a:endParaRPr>
@@ -14153,14 +14250,16 @@
                         </a:spcAft>
                       </a:pPr>
                       <a:r>
-                        <a:rPr lang="fr-FR" sz="900" dirty="0">
+                        <a:rPr lang="fr-FR" sz="1200" dirty="0">
                           <a:effectLst/>
+                          <a:latin typeface="Times New Roman" panose="02020603050405020304" pitchFamily="18" charset="0"/>
+                          <a:cs typeface="Times New Roman" panose="02020603050405020304" pitchFamily="18" charset="0"/>
                         </a:rPr>
                         <a:t>Visualiser les performances multiprocesseurs en temps réel.</a:t>
                       </a:r>
-                      <a:endParaRPr lang="en-US" sz="900" dirty="0">
+                      <a:endParaRPr lang="en-US" sz="1200" dirty="0">
                         <a:effectLst/>
-                        <a:latin typeface="Calibri" panose="020F0502020204030204" pitchFamily="34" charset="0"/>
+                        <a:latin typeface="Times New Roman" panose="02020603050405020304" pitchFamily="18" charset="0"/>
                         <a:ea typeface="Calibri" panose="020F0502020204030204" pitchFamily="34" charset="0"/>
                         <a:cs typeface="Times New Roman" panose="02020603050405020304" pitchFamily="18" charset="0"/>
                       </a:endParaRPr>
@@ -14189,26 +14288,32 @@
                         </a:spcAft>
                       </a:pPr>
                       <a:r>
-                        <a:rPr lang="en-US" sz="900" dirty="0" err="1">
+                        <a:rPr lang="en-US" sz="1200" dirty="0" err="1">
                           <a:effectLst/>
+                          <a:latin typeface="Times New Roman" panose="02020603050405020304" pitchFamily="18" charset="0"/>
+                          <a:cs typeface="Times New Roman" panose="02020603050405020304" pitchFamily="18" charset="0"/>
                         </a:rPr>
                         <a:t>Objectif</a:t>
                       </a:r>
                       <a:r>
-                        <a:rPr lang="en-US" sz="900" dirty="0">
+                        <a:rPr lang="en-US" sz="1200" dirty="0">
                           <a:effectLst/>
+                          <a:latin typeface="Times New Roman" panose="02020603050405020304" pitchFamily="18" charset="0"/>
+                          <a:cs typeface="Times New Roman" panose="02020603050405020304" pitchFamily="18" charset="0"/>
                         </a:rPr>
                         <a:t> du </a:t>
                       </a:r>
                       <a:r>
-                        <a:rPr lang="en-US" sz="900" dirty="0" err="1">
+                        <a:rPr lang="en-US" sz="1200" dirty="0" err="1">
                           <a:effectLst/>
+                          <a:latin typeface="Times New Roman" panose="02020603050405020304" pitchFamily="18" charset="0"/>
+                          <a:cs typeface="Times New Roman" panose="02020603050405020304" pitchFamily="18" charset="0"/>
                         </a:rPr>
                         <a:t>Cas</a:t>
                       </a:r>
-                      <a:endParaRPr lang="en-US" sz="900" dirty="0">
+                      <a:endParaRPr lang="en-US" sz="1200" dirty="0">
                         <a:effectLst/>
-                        <a:latin typeface="Calibri" panose="020F0502020204030204" pitchFamily="34" charset="0"/>
+                        <a:latin typeface="Times New Roman" panose="02020603050405020304" pitchFamily="18" charset="0"/>
                         <a:ea typeface="Calibri" panose="020F0502020204030204" pitchFamily="34" charset="0"/>
                         <a:cs typeface="Times New Roman" panose="02020603050405020304" pitchFamily="18" charset="0"/>
                       </a:endParaRPr>
@@ -14230,14 +14335,16 @@
                         </a:spcAft>
                       </a:pPr>
                       <a:r>
-                        <a:rPr lang="fr-FR" sz="900">
+                        <a:rPr lang="fr-FR" sz="1200">
                           <a:effectLst/>
+                          <a:latin typeface="Times New Roman" panose="02020603050405020304" pitchFamily="18" charset="0"/>
+                          <a:cs typeface="Times New Roman" panose="02020603050405020304" pitchFamily="18" charset="0"/>
                         </a:rPr>
                         <a:t>Permettre à l'utilisateur d'obtenir une représentation graphique et textuelle instantanée de l'état de santé et de la charge de travail de chaque cœur du processeur.</a:t>
                       </a:r>
-                      <a:endParaRPr lang="en-US" sz="900">
+                      <a:endParaRPr lang="en-US" sz="1200">
                         <a:effectLst/>
-                        <a:latin typeface="Calibri" panose="020F0502020204030204" pitchFamily="34" charset="0"/>
+                        <a:latin typeface="Times New Roman" panose="02020603050405020304" pitchFamily="18" charset="0"/>
                         <a:ea typeface="Calibri" panose="020F0502020204030204" pitchFamily="34" charset="0"/>
                         <a:cs typeface="Times New Roman" panose="02020603050405020304" pitchFamily="18" charset="0"/>
                       </a:endParaRPr>
@@ -14266,14 +14373,16 @@
                         </a:spcAft>
                       </a:pPr>
                       <a:r>
-                        <a:rPr lang="en-US" sz="900" dirty="0" err="1">
+                        <a:rPr lang="en-US" sz="1200" dirty="0" err="1">
                           <a:effectLst/>
+                          <a:latin typeface="Times New Roman" panose="02020603050405020304" pitchFamily="18" charset="0"/>
+                          <a:cs typeface="Times New Roman" panose="02020603050405020304" pitchFamily="18" charset="0"/>
                         </a:rPr>
                         <a:t>Acteurs</a:t>
                       </a:r>
-                      <a:endParaRPr lang="en-US" sz="900" dirty="0">
+                      <a:endParaRPr lang="en-US" sz="1200" dirty="0">
                         <a:effectLst/>
-                        <a:latin typeface="Calibri" panose="020F0502020204030204" pitchFamily="34" charset="0"/>
+                        <a:latin typeface="Times New Roman" panose="02020603050405020304" pitchFamily="18" charset="0"/>
                         <a:ea typeface="Calibri" panose="020F0502020204030204" pitchFamily="34" charset="0"/>
                         <a:cs typeface="Times New Roman" panose="02020603050405020304" pitchFamily="18" charset="0"/>
                       </a:endParaRPr>
@@ -14295,55 +14404,71 @@
                         </a:spcAft>
                       </a:pPr>
                       <a:r>
-                        <a:rPr lang="fr-FR" sz="900" dirty="0">
+                        <a:rPr lang="fr-FR" sz="1200" dirty="0">
                           <a:effectLst/>
+                          <a:latin typeface="Times New Roman" panose="02020603050405020304" pitchFamily="18" charset="0"/>
+                          <a:cs typeface="Times New Roman" panose="02020603050405020304" pitchFamily="18" charset="0"/>
                         </a:rPr>
                         <a:t>Principal : Utilisateur Standard </a:t>
                       </a:r>
                       <a:r>
-                        <a:rPr lang="fr-FR" sz="900" dirty="0" smtClean="0">
+                        <a:rPr lang="fr-FR" sz="1200" dirty="0" smtClean="0">
                           <a:effectLst/>
+                          <a:latin typeface="Times New Roman" panose="02020603050405020304" pitchFamily="18" charset="0"/>
+                          <a:cs typeface="Times New Roman" panose="02020603050405020304" pitchFamily="18" charset="0"/>
                         </a:rPr>
                         <a:t>et</a:t>
                       </a:r>
                       <a:r>
-                        <a:rPr lang="fr-FR" sz="900" baseline="0" dirty="0" smtClean="0">
+                        <a:rPr lang="fr-FR" sz="1200" baseline="0" dirty="0" smtClean="0">
                           <a:effectLst/>
+                          <a:latin typeface="Times New Roman" panose="02020603050405020304" pitchFamily="18" charset="0"/>
+                          <a:cs typeface="Times New Roman" panose="02020603050405020304" pitchFamily="18" charset="0"/>
                         </a:rPr>
                         <a:t> </a:t>
                       </a:r>
                       <a:r>
-                        <a:rPr lang="fr-FR" sz="900" dirty="0" smtClean="0">
+                        <a:rPr lang="fr-FR" sz="1200" dirty="0" smtClean="0">
                           <a:effectLst/>
+                          <a:latin typeface="Times New Roman" panose="02020603050405020304" pitchFamily="18" charset="0"/>
+                          <a:cs typeface="Times New Roman" panose="02020603050405020304" pitchFamily="18" charset="0"/>
                         </a:rPr>
                         <a:t>Administrateur</a:t>
                       </a:r>
                       <a:r>
-                        <a:rPr lang="fr-FR" sz="900" dirty="0">
+                        <a:rPr lang="fr-FR" sz="1200" dirty="0">
                           <a:effectLst/>
+                          <a:latin typeface="Times New Roman" panose="02020603050405020304" pitchFamily="18" charset="0"/>
+                          <a:cs typeface="Times New Roman" panose="02020603050405020304" pitchFamily="18" charset="0"/>
                         </a:rPr>
                         <a:t>.</a:t>
                       </a:r>
                       <a:br>
-                        <a:rPr lang="fr-FR" sz="900" dirty="0">
+                        <a:rPr lang="fr-FR" sz="1200" dirty="0">
                           <a:effectLst/>
+                          <a:latin typeface="Times New Roman" panose="02020603050405020304" pitchFamily="18" charset="0"/>
+                          <a:cs typeface="Times New Roman" panose="02020603050405020304" pitchFamily="18" charset="0"/>
                         </a:rPr>
                       </a:br>
                       <a:r>
-                        <a:rPr lang="fr-FR" sz="900" dirty="0">
+                        <a:rPr lang="fr-FR" sz="1200" dirty="0">
                           <a:effectLst/>
+                          <a:latin typeface="Times New Roman" panose="02020603050405020304" pitchFamily="18" charset="0"/>
+                          <a:cs typeface="Times New Roman" panose="02020603050405020304" pitchFamily="18" charset="0"/>
                         </a:rPr>
                         <a:t>Secondaires : Noyau Linux (Fournisseur de données</a:t>
                       </a:r>
                       <a:r>
-                        <a:rPr lang="fr-FR" sz="900" dirty="0" smtClean="0">
+                        <a:rPr lang="fr-FR" sz="1200" dirty="0" smtClean="0">
                           <a:effectLst/>
+                          <a:latin typeface="Times New Roman" panose="02020603050405020304" pitchFamily="18" charset="0"/>
+                          <a:cs typeface="Times New Roman" panose="02020603050405020304" pitchFamily="18" charset="0"/>
                         </a:rPr>
                         <a:t>)</a:t>
                       </a:r>
-                      <a:endParaRPr lang="en-US" sz="900" dirty="0">
+                      <a:endParaRPr lang="en-US" sz="1200" dirty="0">
                         <a:effectLst/>
-                        <a:latin typeface="Calibri" panose="020F0502020204030204" pitchFamily="34" charset="0"/>
+                        <a:latin typeface="Times New Roman" panose="02020603050405020304" pitchFamily="18" charset="0"/>
                         <a:ea typeface="Calibri" panose="020F0502020204030204" pitchFamily="34" charset="0"/>
                         <a:cs typeface="Times New Roman" panose="02020603050405020304" pitchFamily="18" charset="0"/>
                       </a:endParaRPr>
@@ -14372,14 +14497,16 @@
                         </a:spcAft>
                       </a:pPr>
                       <a:r>
-                        <a:rPr lang="en-US" sz="900" dirty="0" err="1">
+                        <a:rPr lang="en-US" sz="1200" dirty="0" err="1">
                           <a:effectLst/>
+                          <a:latin typeface="Times New Roman" panose="02020603050405020304" pitchFamily="18" charset="0"/>
+                          <a:cs typeface="Times New Roman" panose="02020603050405020304" pitchFamily="18" charset="0"/>
                         </a:rPr>
                         <a:t>Pré-supposés</a:t>
                       </a:r>
-                      <a:endParaRPr lang="en-US" sz="900" dirty="0">
+                      <a:endParaRPr lang="en-US" sz="1200" dirty="0">
                         <a:effectLst/>
-                        <a:latin typeface="Calibri" panose="020F0502020204030204" pitchFamily="34" charset="0"/>
+                        <a:latin typeface="Times New Roman" panose="02020603050405020304" pitchFamily="18" charset="0"/>
                         <a:ea typeface="Calibri" panose="020F0502020204030204" pitchFamily="34" charset="0"/>
                         <a:cs typeface="Times New Roman" panose="02020603050405020304" pitchFamily="18" charset="0"/>
                       </a:endParaRPr>
@@ -14401,31 +14528,39 @@
                         </a:spcAft>
                       </a:pPr>
                       <a:r>
-                        <a:rPr lang="fr-FR" sz="900" dirty="0">
+                        <a:rPr lang="fr-FR" sz="1200" dirty="0">
                           <a:effectLst/>
+                          <a:latin typeface="Times New Roman" panose="02020603050405020304" pitchFamily="18" charset="0"/>
+                          <a:cs typeface="Times New Roman" panose="02020603050405020304" pitchFamily="18" charset="0"/>
                         </a:rPr>
                         <a:t>1. L'application est lancée sur une distribution Linux (</a:t>
                       </a:r>
                       <a:r>
-                        <a:rPr lang="fr-FR" sz="900" dirty="0" err="1">
+                        <a:rPr lang="fr-FR" sz="1200" dirty="0" err="1">
                           <a:effectLst/>
+                          <a:latin typeface="Times New Roman" panose="02020603050405020304" pitchFamily="18" charset="0"/>
+                          <a:cs typeface="Times New Roman" panose="02020603050405020304" pitchFamily="18" charset="0"/>
                         </a:rPr>
                         <a:t>openSUSE</a:t>
                       </a:r>
                       <a:r>
-                        <a:rPr lang="fr-FR" sz="900" dirty="0">
+                        <a:rPr lang="fr-FR" sz="1200" dirty="0">
                           <a:effectLst/>
+                          <a:latin typeface="Times New Roman" panose="02020603050405020304" pitchFamily="18" charset="0"/>
+                          <a:cs typeface="Times New Roman" panose="02020603050405020304" pitchFamily="18" charset="0"/>
                         </a:rPr>
                         <a:t>).</a:t>
                       </a:r>
                       <a:br>
-                        <a:rPr lang="fr-FR" sz="900" dirty="0">
+                        <a:rPr lang="fr-FR" sz="1200" dirty="0">
                           <a:effectLst/>
+                          <a:latin typeface="Times New Roman" panose="02020603050405020304" pitchFamily="18" charset="0"/>
+                          <a:cs typeface="Times New Roman" panose="02020603050405020304" pitchFamily="18" charset="0"/>
                         </a:rPr>
                       </a:br>
-                      <a:endParaRPr lang="en-US" sz="900" dirty="0">
+                      <a:endParaRPr lang="en-US" sz="1200" dirty="0">
                         <a:effectLst/>
-                        <a:latin typeface="Calibri" panose="020F0502020204030204" pitchFamily="34" charset="0"/>
+                        <a:latin typeface="Times New Roman" panose="02020603050405020304" pitchFamily="18" charset="0"/>
                         <a:ea typeface="Calibri" panose="020F0502020204030204" pitchFamily="34" charset="0"/>
                         <a:cs typeface="Times New Roman" panose="02020603050405020304" pitchFamily="18" charset="0"/>
                       </a:endParaRPr>
@@ -14454,20 +14589,24 @@
                         </a:spcAft>
                       </a:pPr>
                       <a:r>
-                        <a:rPr lang="en-US" sz="900" dirty="0" err="1">
+                        <a:rPr lang="en-US" sz="1200" dirty="0" err="1">
                           <a:effectLst/>
+                          <a:latin typeface="Times New Roman" panose="02020603050405020304" pitchFamily="18" charset="0"/>
+                          <a:cs typeface="Times New Roman" panose="02020603050405020304" pitchFamily="18" charset="0"/>
                         </a:rPr>
                         <a:t>Pré</a:t>
                       </a:r>
                       <a:r>
-                        <a:rPr lang="en-US" sz="900" dirty="0">
+                        <a:rPr lang="en-US" sz="1200" dirty="0">
                           <a:effectLst/>
+                          <a:latin typeface="Times New Roman" panose="02020603050405020304" pitchFamily="18" charset="0"/>
+                          <a:cs typeface="Times New Roman" panose="02020603050405020304" pitchFamily="18" charset="0"/>
                         </a:rPr>
                         <a:t>-condition</a:t>
                       </a:r>
-                      <a:endParaRPr lang="en-US" sz="900" dirty="0">
+                      <a:endParaRPr lang="en-US" sz="1200" dirty="0">
                         <a:effectLst/>
-                        <a:latin typeface="Calibri" panose="020F0502020204030204" pitchFamily="34" charset="0"/>
+                        <a:latin typeface="Times New Roman" panose="02020603050405020304" pitchFamily="18" charset="0"/>
                         <a:ea typeface="Calibri" panose="020F0502020204030204" pitchFamily="34" charset="0"/>
                         <a:cs typeface="Times New Roman" panose="02020603050405020304" pitchFamily="18" charset="0"/>
                       </a:endParaRPr>
@@ -14489,20 +14628,24 @@
                         </a:spcAft>
                       </a:pPr>
                       <a:r>
-                        <a:rPr lang="fr-FR" sz="900" dirty="0" smtClean="0">
+                        <a:rPr lang="fr-FR" sz="1200" dirty="0" smtClean="0">
                           <a:effectLst/>
+                          <a:latin typeface="Times New Roman" panose="02020603050405020304" pitchFamily="18" charset="0"/>
+                          <a:cs typeface="Times New Roman" panose="02020603050405020304" pitchFamily="18" charset="0"/>
                         </a:rPr>
                         <a:t>Le</a:t>
                       </a:r>
                       <a:r>
-                        <a:rPr lang="fr-FR" sz="900" baseline="0" dirty="0" smtClean="0">
+                        <a:rPr lang="fr-FR" sz="1200" baseline="0" dirty="0" smtClean="0">
                           <a:effectLst/>
+                          <a:latin typeface="Times New Roman" panose="02020603050405020304" pitchFamily="18" charset="0"/>
+                          <a:cs typeface="Times New Roman" panose="02020603050405020304" pitchFamily="18" charset="0"/>
                         </a:rPr>
                         <a:t> matériel est reconnu comme multiprocesseur</a:t>
                       </a:r>
-                      <a:endParaRPr lang="en-US" sz="900" dirty="0">
+                      <a:endParaRPr lang="en-US" sz="1200" dirty="0">
                         <a:effectLst/>
-                        <a:latin typeface="Calibri" panose="020F0502020204030204" pitchFamily="34" charset="0"/>
+                        <a:latin typeface="Times New Roman" panose="02020603050405020304" pitchFamily="18" charset="0"/>
                         <a:ea typeface="Calibri" panose="020F0502020204030204" pitchFamily="34" charset="0"/>
                         <a:cs typeface="Times New Roman" panose="02020603050405020304" pitchFamily="18" charset="0"/>
                       </a:endParaRPr>
@@ -14531,20 +14674,24 @@
                         </a:spcAft>
                       </a:pPr>
                       <a:r>
-                        <a:rPr lang="en-US" sz="900" dirty="0" err="1">
+                        <a:rPr lang="en-US" sz="1200" dirty="0" err="1">
                           <a:effectLst/>
+                          <a:latin typeface="Times New Roman" panose="02020603050405020304" pitchFamily="18" charset="0"/>
+                          <a:cs typeface="Times New Roman" panose="02020603050405020304" pitchFamily="18" charset="0"/>
                         </a:rPr>
                         <a:t>Scénario</a:t>
                       </a:r>
                       <a:r>
-                        <a:rPr lang="en-US" sz="900" dirty="0">
+                        <a:rPr lang="en-US" sz="1200" dirty="0">
                           <a:effectLst/>
+                          <a:latin typeface="Times New Roman" panose="02020603050405020304" pitchFamily="18" charset="0"/>
+                          <a:cs typeface="Times New Roman" panose="02020603050405020304" pitchFamily="18" charset="0"/>
                         </a:rPr>
                         <a:t> Nominal</a:t>
                       </a:r>
-                      <a:endParaRPr lang="en-US" sz="900" dirty="0">
+                      <a:endParaRPr lang="en-US" sz="1200" dirty="0">
                         <a:effectLst/>
-                        <a:latin typeface="Calibri" panose="020F0502020204030204" pitchFamily="34" charset="0"/>
+                        <a:latin typeface="Times New Roman" panose="02020603050405020304" pitchFamily="18" charset="0"/>
                         <a:ea typeface="Calibri" panose="020F0502020204030204" pitchFamily="34" charset="0"/>
                         <a:cs typeface="Times New Roman" panose="02020603050405020304" pitchFamily="18" charset="0"/>
                       </a:endParaRPr>
@@ -14566,178 +14713,172 @@
                         </a:spcAft>
                       </a:pPr>
                       <a:r>
-                        <a:rPr lang="fr-FR" sz="900" dirty="0" smtClean="0">
+                        <a:rPr lang="fr-FR" sz="1200" dirty="0" smtClean="0">
                           <a:effectLst/>
+                          <a:latin typeface="Times New Roman" panose="02020603050405020304" pitchFamily="18" charset="0"/>
+                          <a:cs typeface="Times New Roman" panose="02020603050405020304" pitchFamily="18" charset="0"/>
                         </a:rPr>
                         <a:t>1. L’administrateur</a:t>
                       </a:r>
                       <a:r>
-                        <a:rPr lang="fr-FR" sz="900" baseline="0" dirty="0" smtClean="0">
+                        <a:rPr lang="fr-FR" sz="1200" baseline="0" dirty="0" smtClean="0">
                           <a:effectLst/>
+                          <a:latin typeface="Times New Roman" panose="02020603050405020304" pitchFamily="18" charset="0"/>
+                          <a:cs typeface="Times New Roman" panose="02020603050405020304" pitchFamily="18" charset="0"/>
                         </a:rPr>
                         <a:t> sélectionne le mode « vue Temps Réels</a:t>
                       </a:r>
                       <a:r>
-                        <a:rPr lang="fr-FR" sz="900" dirty="0">
+                        <a:rPr lang="fr-FR" sz="1200" dirty="0">
                           <a:effectLst/>
+                          <a:latin typeface="Times New Roman" panose="02020603050405020304" pitchFamily="18" charset="0"/>
+                          <a:cs typeface="Times New Roman" panose="02020603050405020304" pitchFamily="18" charset="0"/>
                         </a:rPr>
                         <a:t/>
                       </a:r>
                       <a:br>
-                        <a:rPr lang="fr-FR" sz="900" dirty="0">
+                        <a:rPr lang="fr-FR" sz="1200" dirty="0">
                           <a:effectLst/>
+                          <a:latin typeface="Times New Roman" panose="02020603050405020304" pitchFamily="18" charset="0"/>
+                          <a:cs typeface="Times New Roman" panose="02020603050405020304" pitchFamily="18" charset="0"/>
                         </a:rPr>
                       </a:br>
                       <a:r>
-                        <a:rPr lang="fr-FR" sz="900" dirty="0">
+                        <a:rPr lang="fr-FR" sz="1200" dirty="0">
                           <a:effectLst/>
+                          <a:latin typeface="Times New Roman" panose="02020603050405020304" pitchFamily="18" charset="0"/>
+                          <a:cs typeface="Times New Roman" panose="02020603050405020304" pitchFamily="18" charset="0"/>
                         </a:rPr>
                         <a:t>2. </a:t>
                       </a:r>
                       <a:r>
-                        <a:rPr lang="fr-FR" sz="900" dirty="0" smtClean="0">
+                        <a:rPr lang="fr-FR" sz="1200" dirty="0" smtClean="0">
                           <a:effectLst/>
+                          <a:latin typeface="Times New Roman" panose="02020603050405020304" pitchFamily="18" charset="0"/>
+                          <a:cs typeface="Times New Roman" panose="02020603050405020304" pitchFamily="18" charset="0"/>
                         </a:rPr>
                         <a:t>L’affichage est rafraichi</a:t>
                       </a:r>
                       <a:r>
-                        <a:rPr lang="fr-FR" sz="900" baseline="0" dirty="0" smtClean="0">
+                        <a:rPr lang="fr-FR" sz="1200" baseline="0" dirty="0" smtClean="0">
                           <a:effectLst/>
+                          <a:latin typeface="Times New Roman" panose="02020603050405020304" pitchFamily="18" charset="0"/>
+                          <a:cs typeface="Times New Roman" panose="02020603050405020304" pitchFamily="18" charset="0"/>
                         </a:rPr>
                         <a:t> selon l’intervalle</a:t>
                       </a:r>
                       <a:r>
-                        <a:rPr lang="fr-FR" sz="900" dirty="0" smtClean="0">
+                        <a:rPr lang="fr-FR" sz="1200" dirty="0" smtClean="0">
                           <a:effectLst/>
+                          <a:latin typeface="Times New Roman" panose="02020603050405020304" pitchFamily="18" charset="0"/>
+                          <a:cs typeface="Times New Roman" panose="02020603050405020304" pitchFamily="18" charset="0"/>
                         </a:rPr>
                         <a:t/>
                       </a:r>
                       <a:br>
-                        <a:rPr lang="fr-FR" sz="900" dirty="0" smtClean="0">
+                        <a:rPr lang="fr-FR" sz="1200" dirty="0" smtClean="0">
                           <a:effectLst/>
+                          <a:latin typeface="Times New Roman" panose="02020603050405020304" pitchFamily="18" charset="0"/>
+                          <a:cs typeface="Times New Roman" panose="02020603050405020304" pitchFamily="18" charset="0"/>
                         </a:rPr>
                       </a:br>
                       <a:r>
-                        <a:rPr lang="fr-FR" sz="900" dirty="0" smtClean="0">
+                        <a:rPr lang="fr-FR" sz="1200" dirty="0" smtClean="0">
                           <a:effectLst/>
+                          <a:latin typeface="Times New Roman" panose="02020603050405020304" pitchFamily="18" charset="0"/>
+                          <a:cs typeface="Times New Roman" panose="02020603050405020304" pitchFamily="18" charset="0"/>
                         </a:rPr>
                         <a:t>3</a:t>
                       </a:r>
                       <a:r>
-                        <a:rPr lang="fr-FR" sz="900" dirty="0">
+                        <a:rPr lang="fr-FR" sz="1200" dirty="0">
                           <a:effectLst/>
+                          <a:latin typeface="Times New Roman" panose="02020603050405020304" pitchFamily="18" charset="0"/>
+                          <a:cs typeface="Times New Roman" panose="02020603050405020304" pitchFamily="18" charset="0"/>
                         </a:rPr>
                         <a:t>. </a:t>
                       </a:r>
                       <a:r>
-                        <a:rPr lang="fr-FR" sz="900" dirty="0" smtClean="0">
+                        <a:rPr lang="fr-FR" sz="1200" dirty="0" smtClean="0">
                           <a:effectLst/>
+                          <a:latin typeface="Times New Roman" panose="02020603050405020304" pitchFamily="18" charset="0"/>
+                          <a:cs typeface="Times New Roman" panose="02020603050405020304" pitchFamily="18" charset="0"/>
                         </a:rPr>
                         <a:t>Le</a:t>
                       </a:r>
                       <a:r>
-                        <a:rPr lang="fr-FR" sz="900" baseline="0" dirty="0" smtClean="0">
+                        <a:rPr lang="fr-FR" sz="1200" baseline="0" dirty="0" smtClean="0">
                           <a:effectLst/>
+                          <a:latin typeface="Times New Roman" panose="02020603050405020304" pitchFamily="18" charset="0"/>
+                          <a:cs typeface="Times New Roman" panose="02020603050405020304" pitchFamily="18" charset="0"/>
                         </a:rPr>
-                        <a:t> </a:t>
+                        <a:t> système identifie le nombre de cœurs logiques présents sur la machine</a:t>
                       </a:r>
                       <a:r>
-                        <a:rPr lang="fr-FR" sz="900" baseline="0" dirty="0" smtClean="0">
+                        <a:rPr lang="fr-FR" sz="1200" dirty="0">
                           <a:effectLst/>
-                        </a:rPr>
-                        <a:t>système </a:t>
-                      </a:r>
-                      <a:r>
-                        <a:rPr lang="fr-FR" sz="900" baseline="0" dirty="0" smtClean="0">
-                          <a:effectLst/>
-                        </a:rPr>
-                        <a:t>identifie le nombre de cœurs logiques présents sur la machine</a:t>
-                      </a:r>
-                      <a:r>
-                        <a:rPr lang="fr-FR" sz="900" dirty="0">
-                          <a:effectLst/>
+                          <a:latin typeface="Times New Roman" panose="02020603050405020304" pitchFamily="18" charset="0"/>
+                          <a:cs typeface="Times New Roman" panose="02020603050405020304" pitchFamily="18" charset="0"/>
                         </a:rPr>
                         <a:t/>
                       </a:r>
                       <a:br>
-                        <a:rPr lang="fr-FR" sz="900" dirty="0">
+                        <a:rPr lang="fr-FR" sz="1200" dirty="0">
                           <a:effectLst/>
+                          <a:latin typeface="Times New Roman" panose="02020603050405020304" pitchFamily="18" charset="0"/>
+                          <a:cs typeface="Times New Roman" panose="02020603050405020304" pitchFamily="18" charset="0"/>
                         </a:rPr>
                       </a:br>
                       <a:r>
-                        <a:rPr lang="fr-FR" sz="900" dirty="0">
+                        <a:rPr lang="fr-FR" sz="1200" dirty="0">
                           <a:effectLst/>
+                          <a:latin typeface="Times New Roman" panose="02020603050405020304" pitchFamily="18" charset="0"/>
+                          <a:cs typeface="Times New Roman" panose="02020603050405020304" pitchFamily="18" charset="0"/>
                         </a:rPr>
                         <a:t>4. </a:t>
                       </a:r>
                       <a:r>
-                        <a:rPr lang="fr-FR" sz="900" dirty="0" smtClean="0">
+                        <a:rPr lang="fr-FR" sz="1200" dirty="0" smtClean="0">
                           <a:effectLst/>
+                          <a:latin typeface="Times New Roman" panose="02020603050405020304" pitchFamily="18" charset="0"/>
+                          <a:cs typeface="Times New Roman" panose="02020603050405020304" pitchFamily="18" charset="0"/>
                         </a:rPr>
                         <a:t>Le</a:t>
                       </a:r>
                       <a:r>
-                        <a:rPr lang="fr-FR" sz="900" baseline="0" dirty="0" smtClean="0">
+                        <a:rPr lang="fr-FR" sz="1200" baseline="0" dirty="0" smtClean="0">
                           <a:effectLst/>
+                          <a:latin typeface="Times New Roman" panose="02020603050405020304" pitchFamily="18" charset="0"/>
+                          <a:cs typeface="Times New Roman" panose="02020603050405020304" pitchFamily="18" charset="0"/>
                         </a:rPr>
-                        <a:t> </a:t>
+                        <a:t> système extrait simultanément les données suivantes pour chaque cœur (l’utilisation ,la vitesse et la température)</a:t>
                       </a:r>
                       <a:r>
-                        <a:rPr lang="fr-FR" sz="900" baseline="0" dirty="0" smtClean="0">
+                        <a:rPr lang="fr-FR" sz="1200" dirty="0">
                           <a:effectLst/>
-                        </a:rPr>
-                        <a:t>système </a:t>
-                      </a:r>
-                      <a:r>
-                        <a:rPr lang="fr-FR" sz="900" baseline="0" dirty="0" smtClean="0">
-                          <a:effectLst/>
-                        </a:rPr>
-                        <a:t>extrait </a:t>
-                      </a:r>
-                      <a:r>
-                        <a:rPr lang="fr-FR" sz="900" baseline="0" dirty="0" smtClean="0">
-                          <a:effectLst/>
-                        </a:rPr>
-                        <a:t>simultanément </a:t>
-                      </a:r>
-                      <a:r>
-                        <a:rPr lang="fr-FR" sz="900" baseline="0" dirty="0" smtClean="0">
-                          <a:effectLst/>
-                        </a:rPr>
-                        <a:t>les données suivantes pour chaque cœur (</a:t>
-                      </a:r>
-                      <a:r>
-                        <a:rPr lang="fr-FR" sz="900" baseline="0" dirty="0" smtClean="0">
-                          <a:effectLst/>
-                        </a:rPr>
-                        <a:t>l’utilisation ,</a:t>
-                      </a:r>
-                      <a:r>
-                        <a:rPr lang="fr-FR" sz="900" baseline="0" dirty="0" smtClean="0">
-                          <a:effectLst/>
-                        </a:rPr>
-                        <a:t>la vitesse et la température)</a:t>
-                      </a:r>
-                      <a:r>
-                        <a:rPr lang="fr-FR" sz="900" dirty="0">
-                          <a:effectLst/>
+                          <a:latin typeface="Times New Roman" panose="02020603050405020304" pitchFamily="18" charset="0"/>
+                          <a:cs typeface="Times New Roman" panose="02020603050405020304" pitchFamily="18" charset="0"/>
                         </a:rPr>
                         <a:t/>
                       </a:r>
                       <a:br>
-                        <a:rPr lang="fr-FR" sz="900" dirty="0">
+                        <a:rPr lang="fr-FR" sz="1200" dirty="0">
                           <a:effectLst/>
+                          <a:latin typeface="Times New Roman" panose="02020603050405020304" pitchFamily="18" charset="0"/>
+                          <a:cs typeface="Times New Roman" panose="02020603050405020304" pitchFamily="18" charset="0"/>
                         </a:rPr>
                       </a:br>
                       <a:r>
-                        <a:rPr lang="fr-FR" sz="900" dirty="0">
+                        <a:rPr lang="fr-FR" sz="1200" dirty="0">
                           <a:effectLst/>
+                          <a:latin typeface="Times New Roman" panose="02020603050405020304" pitchFamily="18" charset="0"/>
+                          <a:cs typeface="Times New Roman" panose="02020603050405020304" pitchFamily="18" charset="0"/>
                         </a:rPr>
                         <a:t>5. L'interface rafraîchit l'affichage pour l'utilisateur.</a:t>
                       </a:r>
-                      <a:endParaRPr lang="en-US" sz="900" dirty="0">
+                      <a:endParaRPr lang="en-US" sz="1200" dirty="0">
                         <a:effectLst/>
-                        <a:latin typeface="Calibri" panose="020F0502020204030204" pitchFamily="34" charset="0"/>
+                        <a:latin typeface="Times New Roman" panose="02020603050405020304" pitchFamily="18" charset="0"/>
                         <a:ea typeface="Calibri" panose="020F0502020204030204" pitchFamily="34" charset="0"/>
                         <a:cs typeface="Times New Roman" panose="02020603050405020304" pitchFamily="18" charset="0"/>
                       </a:endParaRPr>
@@ -14766,26 +14907,32 @@
                         </a:spcAft>
                       </a:pPr>
                       <a:r>
-                        <a:rPr lang="en-US" sz="900" dirty="0" smtClean="0">
+                        <a:rPr lang="en-US" sz="1200" dirty="0" smtClean="0">
                           <a:effectLst/>
+                          <a:latin typeface="Times New Roman" panose="02020603050405020304" pitchFamily="18" charset="0"/>
+                          <a:cs typeface="Times New Roman" panose="02020603050405020304" pitchFamily="18" charset="0"/>
                         </a:rPr>
                         <a:t>Scenario </a:t>
                       </a:r>
                       <a:r>
-                        <a:rPr lang="en-US" sz="900" dirty="0" err="1">
+                        <a:rPr lang="en-US" sz="1200" dirty="0" err="1">
                           <a:effectLst/>
+                          <a:latin typeface="Times New Roman" panose="02020603050405020304" pitchFamily="18" charset="0"/>
+                          <a:cs typeface="Times New Roman" panose="02020603050405020304" pitchFamily="18" charset="0"/>
                         </a:rPr>
                         <a:t>Alternatif</a:t>
                       </a:r>
                       <a:r>
-                        <a:rPr lang="en-US" sz="900" dirty="0">
+                        <a:rPr lang="en-US" sz="1200" dirty="0">
                           <a:effectLst/>
+                          <a:latin typeface="Times New Roman" panose="02020603050405020304" pitchFamily="18" charset="0"/>
+                          <a:cs typeface="Times New Roman" panose="02020603050405020304" pitchFamily="18" charset="0"/>
                         </a:rPr>
                         <a:t> / Exception</a:t>
                       </a:r>
-                      <a:endParaRPr lang="en-US" sz="900" dirty="0">
+                      <a:endParaRPr lang="en-US" sz="1200" dirty="0">
                         <a:effectLst/>
-                        <a:latin typeface="Calibri" panose="020F0502020204030204" pitchFamily="34" charset="0"/>
+                        <a:latin typeface="Times New Roman" panose="02020603050405020304" pitchFamily="18" charset="0"/>
                         <a:ea typeface="Calibri" panose="020F0502020204030204" pitchFamily="34" charset="0"/>
                         <a:cs typeface="Times New Roman" panose="02020603050405020304" pitchFamily="18" charset="0"/>
                       </a:endParaRPr>
@@ -14807,73 +14954,95 @@
                         </a:spcAft>
                       </a:pPr>
                       <a:r>
-                        <a:rPr lang="fr-FR" sz="900" b="1" dirty="0" smtClean="0">
+                        <a:rPr lang="fr-FR" sz="1200" b="1" dirty="0" smtClean="0">
                           <a:effectLst/>
+                          <a:latin typeface="Times New Roman" panose="02020603050405020304" pitchFamily="18" charset="0"/>
+                          <a:cs typeface="Times New Roman" panose="02020603050405020304" pitchFamily="18" charset="0"/>
                         </a:rPr>
                         <a:t>S1</a:t>
                       </a:r>
                       <a:r>
-                        <a:rPr lang="fr-FR" sz="900" b="1" dirty="0">
+                        <a:rPr lang="fr-FR" sz="1200" b="1" dirty="0">
                           <a:effectLst/>
+                          <a:latin typeface="Times New Roman" panose="02020603050405020304" pitchFamily="18" charset="0"/>
+                          <a:cs typeface="Times New Roman" panose="02020603050405020304" pitchFamily="18" charset="0"/>
                         </a:rPr>
                         <a:t>. </a:t>
                       </a:r>
                       <a:r>
-                        <a:rPr lang="fr-FR" sz="900" dirty="0">
+                        <a:rPr lang="fr-FR" sz="1200" dirty="0">
                           <a:effectLst/>
+                          <a:latin typeface="Times New Roman" panose="02020603050405020304" pitchFamily="18" charset="0"/>
+                          <a:cs typeface="Times New Roman" panose="02020603050405020304" pitchFamily="18" charset="0"/>
                         </a:rPr>
                         <a:t>Données corrompues : Si une ligne </a:t>
                       </a:r>
                       <a:r>
-                        <a:rPr lang="fr-FR" sz="900" dirty="0" smtClean="0">
+                        <a:rPr lang="fr-FR" sz="1200" dirty="0" smtClean="0">
                           <a:effectLst/>
+                          <a:latin typeface="Times New Roman" panose="02020603050405020304" pitchFamily="18" charset="0"/>
+                          <a:cs typeface="Times New Roman" panose="02020603050405020304" pitchFamily="18" charset="0"/>
                         </a:rPr>
                         <a:t>lue</a:t>
                       </a:r>
                       <a:r>
-                        <a:rPr lang="fr-FR" sz="900" baseline="0" dirty="0" smtClean="0">
+                        <a:rPr lang="fr-FR" sz="1200" baseline="0" dirty="0" smtClean="0">
                           <a:effectLst/>
+                          <a:latin typeface="Times New Roman" panose="02020603050405020304" pitchFamily="18" charset="0"/>
+                          <a:cs typeface="Times New Roman" panose="02020603050405020304" pitchFamily="18" charset="0"/>
                         </a:rPr>
                         <a:t> par EBPF </a:t>
                       </a:r>
                       <a:r>
-                        <a:rPr lang="fr-FR" sz="900" dirty="0" smtClean="0">
+                        <a:rPr lang="fr-FR" sz="1200" dirty="0" smtClean="0">
                           <a:effectLst/>
+                          <a:latin typeface="Times New Roman" panose="02020603050405020304" pitchFamily="18" charset="0"/>
+                          <a:cs typeface="Times New Roman" panose="02020603050405020304" pitchFamily="18" charset="0"/>
                         </a:rPr>
                         <a:t>est </a:t>
                       </a:r>
                       <a:r>
-                        <a:rPr lang="fr-FR" sz="900" dirty="0">
+                        <a:rPr lang="fr-FR" sz="1200" dirty="0">
                           <a:effectLst/>
+                          <a:latin typeface="Times New Roman" panose="02020603050405020304" pitchFamily="18" charset="0"/>
+                          <a:cs typeface="Times New Roman" panose="02020603050405020304" pitchFamily="18" charset="0"/>
                         </a:rPr>
                         <a:t>illisible, le système ignore le cycle actuel et conserve la dernière valeur connue.</a:t>
                       </a:r>
                       <a:br>
-                        <a:rPr lang="fr-FR" sz="900" dirty="0">
+                        <a:rPr lang="fr-FR" sz="1200" dirty="0">
                           <a:effectLst/>
+                          <a:latin typeface="Times New Roman" panose="02020603050405020304" pitchFamily="18" charset="0"/>
+                          <a:cs typeface="Times New Roman" panose="02020603050405020304" pitchFamily="18" charset="0"/>
                         </a:rPr>
                       </a:br>
                       <a:r>
-                        <a:rPr lang="fr-FR" sz="900" b="1" dirty="0" smtClean="0">
+                        <a:rPr lang="fr-FR" sz="1200" b="1" dirty="0" smtClean="0">
                           <a:effectLst/>
+                          <a:latin typeface="Times New Roman" panose="02020603050405020304" pitchFamily="18" charset="0"/>
+                          <a:cs typeface="Times New Roman" panose="02020603050405020304" pitchFamily="18" charset="0"/>
                         </a:rPr>
                         <a:t>S2</a:t>
                       </a:r>
                       <a:r>
-                        <a:rPr lang="fr-FR" sz="900" dirty="0" smtClean="0">
+                        <a:rPr lang="fr-FR" sz="1200" dirty="0" smtClean="0">
                           <a:effectLst/>
+                          <a:latin typeface="Times New Roman" panose="02020603050405020304" pitchFamily="18" charset="0"/>
+                          <a:cs typeface="Times New Roman" panose="02020603050405020304" pitchFamily="18" charset="0"/>
                         </a:rPr>
                         <a:t>. </a:t>
                       </a:r>
                       <a:r>
-                        <a:rPr lang="fr-FR" sz="900" dirty="0">
+                        <a:rPr lang="fr-FR" sz="1200" dirty="0">
                           <a:effectLst/>
+                          <a:latin typeface="Times New Roman" panose="02020603050405020304" pitchFamily="18" charset="0"/>
+                          <a:cs typeface="Times New Roman" panose="02020603050405020304" pitchFamily="18" charset="0"/>
                         </a:rPr>
                         <a:t>Permission refusée : Si l'accès aux sondes ACPI est bloqué, le système affiche "N/A" pour la température tout en continuant d'afficher la charge CPU.</a:t>
                       </a:r>
-                      <a:endParaRPr lang="en-US" sz="900" dirty="0">
+                      <a:endParaRPr lang="en-US" sz="1200" dirty="0">
                         <a:effectLst/>
-                        <a:latin typeface="Calibri" panose="020F0502020204030204" pitchFamily="34" charset="0"/>
+                        <a:latin typeface="Times New Roman" panose="02020603050405020304" pitchFamily="18" charset="0"/>
                         <a:ea typeface="Calibri" panose="020F0502020204030204" pitchFamily="34" charset="0"/>
                         <a:cs typeface="Times New Roman" panose="02020603050405020304" pitchFamily="18" charset="0"/>
                       </a:endParaRPr>
@@ -14902,14 +15071,16 @@
                         </a:spcAft>
                       </a:pPr>
                       <a:r>
-                        <a:rPr lang="en-US" sz="900" dirty="0">
+                        <a:rPr lang="en-US" sz="1200" dirty="0">
                           <a:effectLst/>
+                          <a:latin typeface="Times New Roman" panose="02020603050405020304" pitchFamily="18" charset="0"/>
+                          <a:cs typeface="Times New Roman" panose="02020603050405020304" pitchFamily="18" charset="0"/>
                         </a:rPr>
                         <a:t>Post-condition</a:t>
                       </a:r>
-                      <a:endParaRPr lang="en-US" sz="900" dirty="0">
+                      <a:endParaRPr lang="en-US" sz="1200" dirty="0">
                         <a:effectLst/>
-                        <a:latin typeface="Calibri" panose="020F0502020204030204" pitchFamily="34" charset="0"/>
+                        <a:latin typeface="Times New Roman" panose="02020603050405020304" pitchFamily="18" charset="0"/>
                         <a:ea typeface="Calibri" panose="020F0502020204030204" pitchFamily="34" charset="0"/>
                         <a:cs typeface="Times New Roman" panose="02020603050405020304" pitchFamily="18" charset="0"/>
                       </a:endParaRPr>
@@ -14931,14 +15102,16 @@
                         </a:spcAft>
                       </a:pPr>
                       <a:r>
-                        <a:rPr lang="fr-FR" sz="900" dirty="0">
+                        <a:rPr lang="fr-FR" sz="1200" dirty="0">
                           <a:effectLst/>
+                          <a:latin typeface="Times New Roman" panose="02020603050405020304" pitchFamily="18" charset="0"/>
+                          <a:cs typeface="Times New Roman" panose="02020603050405020304" pitchFamily="18" charset="0"/>
                         </a:rPr>
                         <a:t>Le tableau de bord affiche les données les plus récentes et le tampon d'historique (cache) est mis à jour pour le prochain tracé graphique.</a:t>
                       </a:r>
-                      <a:endParaRPr lang="en-US" sz="900" dirty="0">
+                      <a:endParaRPr lang="en-US" sz="1200" dirty="0">
                         <a:effectLst/>
-                        <a:latin typeface="Calibri" panose="020F0502020204030204" pitchFamily="34" charset="0"/>
+                        <a:latin typeface="Times New Roman" panose="02020603050405020304" pitchFamily="18" charset="0"/>
                         <a:ea typeface="Calibri" panose="020F0502020204030204" pitchFamily="34" charset="0"/>
                         <a:cs typeface="Times New Roman" panose="02020603050405020304" pitchFamily="18" charset="0"/>
                       </a:endParaRPr>
@@ -15002,7 +15175,7 @@
           <p:nvPr>
             <p:extLst>
               <p:ext uri="{D42A27DB-BD31-4B8C-83A1-F6EECF244321}">
-                <p14:modId xmlns:p14="http://schemas.microsoft.com/office/powerpoint/2010/main" val="1137006735"/>
+                <p14:modId xmlns:p14="http://schemas.microsoft.com/office/powerpoint/2010/main" val="3687171983"/>
               </p:ext>
             </p:extLst>
           </p:nvPr>
@@ -15048,14 +15221,16 @@
                         </a:spcAft>
                       </a:pPr>
                       <a:r>
-                        <a:rPr lang="fr-FR" sz="1100" dirty="0">
+                        <a:rPr lang="fr-FR" sz="1200" dirty="0">
                           <a:effectLst/>
+                          <a:latin typeface="Times New Roman" panose="02020603050405020304" pitchFamily="18" charset="0"/>
+                          <a:cs typeface="Times New Roman" panose="02020603050405020304" pitchFamily="18" charset="0"/>
                         </a:rPr>
                         <a:t>Nom du Cas</a:t>
                       </a:r>
-                      <a:endParaRPr lang="en-US" sz="1100" dirty="0">
+                      <a:endParaRPr lang="en-US" sz="1200" dirty="0">
                         <a:effectLst/>
-                        <a:latin typeface="Calibri" panose="020F0502020204030204" pitchFamily="34" charset="0"/>
+                        <a:latin typeface="Times New Roman" panose="02020603050405020304" pitchFamily="18" charset="0"/>
                         <a:ea typeface="Calibri" panose="020F0502020204030204" pitchFamily="34" charset="0"/>
                         <a:cs typeface="Times New Roman" panose="02020603050405020304" pitchFamily="18" charset="0"/>
                       </a:endParaRPr>
@@ -15077,14 +15252,16 @@
                         </a:spcAft>
                       </a:pPr>
                       <a:r>
-                        <a:rPr lang="fr-FR" sz="1100" dirty="0">
+                        <a:rPr lang="fr-FR" sz="1200" dirty="0">
                           <a:effectLst/>
+                          <a:latin typeface="Times New Roman" panose="02020603050405020304" pitchFamily="18" charset="0"/>
+                          <a:cs typeface="Times New Roman" panose="02020603050405020304" pitchFamily="18" charset="0"/>
                         </a:rPr>
                         <a:t>Fournir les données système (Métriques CPU).</a:t>
                       </a:r>
-                      <a:endParaRPr lang="en-US" sz="1100" dirty="0">
+                      <a:endParaRPr lang="en-US" sz="1200" dirty="0">
                         <a:effectLst/>
-                        <a:latin typeface="Calibri" panose="020F0502020204030204" pitchFamily="34" charset="0"/>
+                        <a:latin typeface="Times New Roman" panose="02020603050405020304" pitchFamily="18" charset="0"/>
                         <a:ea typeface="Calibri" panose="020F0502020204030204" pitchFamily="34" charset="0"/>
                         <a:cs typeface="Times New Roman" panose="02020603050405020304" pitchFamily="18" charset="0"/>
                       </a:endParaRPr>
@@ -15113,14 +15290,16 @@
                         </a:spcAft>
                       </a:pPr>
                       <a:r>
-                        <a:rPr lang="fr-FR" sz="1100" dirty="0">
+                        <a:rPr lang="fr-FR" sz="1200" dirty="0">
                           <a:effectLst/>
+                          <a:latin typeface="Times New Roman" panose="02020603050405020304" pitchFamily="18" charset="0"/>
+                          <a:cs typeface="Times New Roman" panose="02020603050405020304" pitchFamily="18" charset="0"/>
                         </a:rPr>
                         <a:t>Objectif du Cas</a:t>
                       </a:r>
-                      <a:endParaRPr lang="en-US" sz="1100" dirty="0">
+                      <a:endParaRPr lang="en-US" sz="1200" dirty="0">
                         <a:effectLst/>
-                        <a:latin typeface="Calibri" panose="020F0502020204030204" pitchFamily="34" charset="0"/>
+                        <a:latin typeface="Times New Roman" panose="02020603050405020304" pitchFamily="18" charset="0"/>
                         <a:ea typeface="Calibri" panose="020F0502020204030204" pitchFamily="34" charset="0"/>
                         <a:cs typeface="Times New Roman" panose="02020603050405020304" pitchFamily="18" charset="0"/>
                       </a:endParaRPr>
@@ -15142,14 +15321,16 @@
                         </a:spcAft>
                       </a:pPr>
                       <a:r>
-                        <a:rPr lang="fr-FR" sz="1100">
+                        <a:rPr lang="fr-FR" sz="1200">
                           <a:effectLst/>
+                          <a:latin typeface="Times New Roman" panose="02020603050405020304" pitchFamily="18" charset="0"/>
+                          <a:cs typeface="Times New Roman" panose="02020603050405020304" pitchFamily="18" charset="0"/>
                         </a:rPr>
                         <a:t>Extraire de manière brute et fiable les statistiques de performance du matériel pour les mettre à disposition du module d'analyse de l'application.</a:t>
                       </a:r>
-                      <a:endParaRPr lang="en-US" sz="1100">
+                      <a:endParaRPr lang="en-US" sz="1200">
                         <a:effectLst/>
-                        <a:latin typeface="Calibri" panose="020F0502020204030204" pitchFamily="34" charset="0"/>
+                        <a:latin typeface="Times New Roman" panose="02020603050405020304" pitchFamily="18" charset="0"/>
                         <a:ea typeface="Calibri" panose="020F0502020204030204" pitchFamily="34" charset="0"/>
                         <a:cs typeface="Times New Roman" panose="02020603050405020304" pitchFamily="18" charset="0"/>
                       </a:endParaRPr>
@@ -15178,14 +15359,16 @@
                         </a:spcAft>
                       </a:pPr>
                       <a:r>
-                        <a:rPr lang="fr-FR" sz="1100">
+                        <a:rPr lang="fr-FR" sz="1200">
                           <a:effectLst/>
+                          <a:latin typeface="Times New Roman" panose="02020603050405020304" pitchFamily="18" charset="0"/>
+                          <a:cs typeface="Times New Roman" panose="02020603050405020304" pitchFamily="18" charset="0"/>
                         </a:rPr>
                         <a:t>Acteurs</a:t>
                       </a:r>
-                      <a:endParaRPr lang="en-US" sz="1100">
+                      <a:endParaRPr lang="en-US" sz="1200">
                         <a:effectLst/>
-                        <a:latin typeface="Calibri" panose="020F0502020204030204" pitchFamily="34" charset="0"/>
+                        <a:latin typeface="Times New Roman" panose="02020603050405020304" pitchFamily="18" charset="0"/>
                         <a:ea typeface="Calibri" panose="020F0502020204030204" pitchFamily="34" charset="0"/>
                         <a:cs typeface="Times New Roman" panose="02020603050405020304" pitchFamily="18" charset="0"/>
                       </a:endParaRPr>
@@ -15199,32 +15382,40 @@
                     <a:lstStyle/>
                     <a:p>
                       <a:r>
-                        <a:rPr lang="fr-CM" sz="1100" dirty="0" smtClean="0">
+                        <a:rPr lang="fr-CM" sz="1200" dirty="0" smtClean="0">
                           <a:effectLst/>
+                          <a:latin typeface="Times New Roman" panose="02020603050405020304" pitchFamily="18" charset="0"/>
+                          <a:cs typeface="Times New Roman" panose="02020603050405020304" pitchFamily="18" charset="0"/>
                         </a:rPr>
                         <a:t>Secondaire</a:t>
                       </a:r>
                       <a:r>
-                        <a:rPr lang="fr-CM" sz="1100" baseline="0" dirty="0" smtClean="0">
+                        <a:rPr lang="fr-CM" sz="1200" baseline="0" dirty="0" smtClean="0">
                           <a:effectLst/>
+                          <a:latin typeface="Times New Roman" panose="02020603050405020304" pitchFamily="18" charset="0"/>
+                          <a:cs typeface="Times New Roman" panose="02020603050405020304" pitchFamily="18" charset="0"/>
                         </a:rPr>
                         <a:t> </a:t>
                       </a:r>
                       <a:r>
-                        <a:rPr lang="fr-CM" sz="1100" dirty="0" smtClean="0">
+                        <a:rPr lang="fr-CM" sz="1200" dirty="0" smtClean="0">
                           <a:effectLst/>
+                          <a:latin typeface="Times New Roman" panose="02020603050405020304" pitchFamily="18" charset="0"/>
+                          <a:cs typeface="Times New Roman" panose="02020603050405020304" pitchFamily="18" charset="0"/>
                         </a:rPr>
                         <a:t>: </a:t>
                       </a:r>
                       <a:r>
-                        <a:rPr lang="fr-CM" sz="1100" dirty="0">
+                        <a:rPr lang="fr-CM" sz="1200" dirty="0">
                           <a:effectLst/>
+                          <a:latin typeface="Times New Roman" panose="02020603050405020304" pitchFamily="18" charset="0"/>
+                          <a:cs typeface="Times New Roman" panose="02020603050405020304" pitchFamily="18" charset="0"/>
                         </a:rPr>
                         <a:t>Noyau Linux </a:t>
                       </a:r>
-                      <a:endParaRPr lang="en-US" sz="1100" dirty="0">
+                      <a:endParaRPr lang="en-US" sz="1200" dirty="0">
                         <a:effectLst/>
-                        <a:latin typeface="Calibri" panose="020F0502020204030204" pitchFamily="34" charset="0"/>
+                        <a:latin typeface="Times New Roman" panose="02020603050405020304" pitchFamily="18" charset="0"/>
                         <a:ea typeface="Times New Roman" panose="02020603050405020304" pitchFamily="18" charset="0"/>
                         <a:cs typeface="Times New Roman" panose="02020603050405020304" pitchFamily="18" charset="0"/>
                       </a:endParaRPr>
@@ -15253,14 +15444,16 @@
                         </a:spcAft>
                       </a:pPr>
                       <a:r>
-                        <a:rPr lang="fr-FR" sz="1100" dirty="0" err="1">
+                        <a:rPr lang="fr-FR" sz="1200" dirty="0" err="1">
                           <a:effectLst/>
+                          <a:latin typeface="Times New Roman" panose="02020603050405020304" pitchFamily="18" charset="0"/>
+                          <a:cs typeface="Times New Roman" panose="02020603050405020304" pitchFamily="18" charset="0"/>
                         </a:rPr>
                         <a:t>Pré-supposés</a:t>
                       </a:r>
-                      <a:endParaRPr lang="en-US" sz="1100" dirty="0">
+                      <a:endParaRPr lang="en-US" sz="1200" dirty="0">
                         <a:effectLst/>
-                        <a:latin typeface="Calibri" panose="020F0502020204030204" pitchFamily="34" charset="0"/>
+                        <a:latin typeface="Times New Roman" panose="02020603050405020304" pitchFamily="18" charset="0"/>
                         <a:ea typeface="Calibri" panose="020F0502020204030204" pitchFamily="34" charset="0"/>
                         <a:cs typeface="Times New Roman" panose="02020603050405020304" pitchFamily="18" charset="0"/>
                       </a:endParaRPr>
@@ -15274,37 +15467,47 @@
                     <a:lstStyle/>
                     <a:p>
                       <a:r>
-                        <a:rPr lang="fr-CM" sz="1100" dirty="0">
+                        <a:rPr lang="fr-CM" sz="1200" dirty="0">
                           <a:effectLst/>
+                          <a:latin typeface="Times New Roman" panose="02020603050405020304" pitchFamily="18" charset="0"/>
+                          <a:cs typeface="Times New Roman" panose="02020603050405020304" pitchFamily="18" charset="0"/>
                         </a:rPr>
                         <a:t>1. Le processeur est actif et génère des compteurs de cycles.</a:t>
                       </a:r>
-                      <a:endParaRPr lang="en-US" sz="1100" dirty="0">
+                      <a:endParaRPr lang="en-US" sz="1200" dirty="0">
                         <a:effectLst/>
+                        <a:latin typeface="Times New Roman" panose="02020603050405020304" pitchFamily="18" charset="0"/>
+                        <a:cs typeface="Times New Roman" panose="02020603050405020304" pitchFamily="18" charset="0"/>
                       </a:endParaRPr>
                     </a:p>
                     <a:p>
                       <a:r>
-                        <a:rPr lang="fr-CM" sz="1100" dirty="0">
+                        <a:rPr lang="fr-CM" sz="1200" dirty="0">
                           <a:effectLst/>
+                          <a:latin typeface="Times New Roman" panose="02020603050405020304" pitchFamily="18" charset="0"/>
+                          <a:cs typeface="Times New Roman" panose="02020603050405020304" pitchFamily="18" charset="0"/>
                         </a:rPr>
                         <a:t>2. Les drivers ACPI et thermiques sont chargés dans le noyau </a:t>
                       </a:r>
                       <a:r>
-                        <a:rPr lang="fr-CM" sz="1100" dirty="0" err="1">
+                        <a:rPr lang="fr-CM" sz="1200" dirty="0" err="1">
                           <a:effectLst/>
+                          <a:latin typeface="Times New Roman" panose="02020603050405020304" pitchFamily="18" charset="0"/>
+                          <a:cs typeface="Times New Roman" panose="02020603050405020304" pitchFamily="18" charset="0"/>
                         </a:rPr>
                         <a:t>openSUSE</a:t>
                       </a:r>
                       <a:r>
-                        <a:rPr lang="fr-CM" sz="1100" dirty="0">
+                        <a:rPr lang="fr-CM" sz="1200" dirty="0">
                           <a:effectLst/>
+                          <a:latin typeface="Times New Roman" panose="02020603050405020304" pitchFamily="18" charset="0"/>
+                          <a:cs typeface="Times New Roman" panose="02020603050405020304" pitchFamily="18" charset="0"/>
                         </a:rPr>
                         <a:t>.</a:t>
                       </a:r>
-                      <a:endParaRPr lang="en-US" sz="1100" dirty="0">
+                      <a:endParaRPr lang="en-US" sz="1200" dirty="0">
                         <a:effectLst/>
-                        <a:latin typeface="Calibri" panose="020F0502020204030204" pitchFamily="34" charset="0"/>
+                        <a:latin typeface="Times New Roman" panose="02020603050405020304" pitchFamily="18" charset="0"/>
                         <a:ea typeface="Times New Roman" panose="02020603050405020304" pitchFamily="18" charset="0"/>
                         <a:cs typeface="Times New Roman" panose="02020603050405020304" pitchFamily="18" charset="0"/>
                       </a:endParaRPr>
@@ -15333,14 +15536,16 @@
                         </a:spcAft>
                       </a:pPr>
                       <a:r>
-                        <a:rPr lang="fr-FR" sz="1100" dirty="0" err="1">
+                        <a:rPr lang="fr-FR" sz="1200" dirty="0" err="1">
                           <a:effectLst/>
+                          <a:latin typeface="Times New Roman" panose="02020603050405020304" pitchFamily="18" charset="0"/>
+                          <a:cs typeface="Times New Roman" panose="02020603050405020304" pitchFamily="18" charset="0"/>
                         </a:rPr>
                         <a:t>Pré-condition</a:t>
                       </a:r>
-                      <a:endParaRPr lang="en-US" sz="1100" dirty="0">
+                      <a:endParaRPr lang="en-US" sz="1200" dirty="0">
                         <a:effectLst/>
-                        <a:latin typeface="Calibri" panose="020F0502020204030204" pitchFamily="34" charset="0"/>
+                        <a:latin typeface="Times New Roman" panose="02020603050405020304" pitchFamily="18" charset="0"/>
                         <a:ea typeface="Calibri" panose="020F0502020204030204" pitchFamily="34" charset="0"/>
                         <a:cs typeface="Times New Roman" panose="02020603050405020304" pitchFamily="18" charset="0"/>
                       </a:endParaRPr>
@@ -15362,26 +15567,32 @@
                         </a:spcAft>
                       </a:pPr>
                       <a:r>
-                        <a:rPr lang="fr-FR" sz="1100" dirty="0">
+                        <a:rPr lang="fr-FR" sz="1200" dirty="0">
                           <a:effectLst/>
+                          <a:latin typeface="Times New Roman" panose="02020603050405020304" pitchFamily="18" charset="0"/>
+                          <a:cs typeface="Times New Roman" panose="02020603050405020304" pitchFamily="18" charset="0"/>
                         </a:rPr>
                         <a:t>L'application a sollicité une requête de lecture ou le </a:t>
                       </a:r>
                       <a:r>
-                        <a:rPr lang="fr-FR" sz="1100" dirty="0" err="1">
+                        <a:rPr lang="fr-FR" sz="1200" dirty="0" err="1">
                           <a:effectLst/>
+                          <a:latin typeface="Times New Roman" panose="02020603050405020304" pitchFamily="18" charset="0"/>
+                          <a:cs typeface="Times New Roman" panose="02020603050405020304" pitchFamily="18" charset="0"/>
                         </a:rPr>
                         <a:t>timer</a:t>
                       </a:r>
                       <a:r>
-                        <a:rPr lang="fr-FR" sz="1100" dirty="0">
+                        <a:rPr lang="fr-FR" sz="1200" dirty="0">
                           <a:effectLst/>
+                          <a:latin typeface="Times New Roman" panose="02020603050405020304" pitchFamily="18" charset="0"/>
+                          <a:cs typeface="Times New Roman" panose="02020603050405020304" pitchFamily="18" charset="0"/>
                         </a:rPr>
                         <a:t> de rafraîchissement a expiré.</a:t>
                       </a:r>
-                      <a:endParaRPr lang="en-US" sz="1100" dirty="0">
+                      <a:endParaRPr lang="en-US" sz="1200" dirty="0">
                         <a:effectLst/>
-                        <a:latin typeface="Calibri" panose="020F0502020204030204" pitchFamily="34" charset="0"/>
+                        <a:latin typeface="Times New Roman" panose="02020603050405020304" pitchFamily="18" charset="0"/>
                         <a:ea typeface="Calibri" panose="020F0502020204030204" pitchFamily="34" charset="0"/>
                         <a:cs typeface="Times New Roman" panose="02020603050405020304" pitchFamily="18" charset="0"/>
                       </a:endParaRPr>
@@ -15410,14 +15621,16 @@
                         </a:spcAft>
                       </a:pPr>
                       <a:r>
-                        <a:rPr lang="fr-FR" sz="1100" dirty="0">
+                        <a:rPr lang="fr-FR" sz="1200" dirty="0">
                           <a:effectLst/>
+                          <a:latin typeface="Times New Roman" panose="02020603050405020304" pitchFamily="18" charset="0"/>
+                          <a:cs typeface="Times New Roman" panose="02020603050405020304" pitchFamily="18" charset="0"/>
                         </a:rPr>
                         <a:t>Scénario Nominal</a:t>
                       </a:r>
-                      <a:endParaRPr lang="en-US" sz="1100" dirty="0">
+                      <a:endParaRPr lang="en-US" sz="1200" dirty="0">
                         <a:effectLst/>
-                        <a:latin typeface="Calibri" panose="020F0502020204030204" pitchFamily="34" charset="0"/>
+                        <a:latin typeface="Times New Roman" panose="02020603050405020304" pitchFamily="18" charset="0"/>
                         <a:ea typeface="Calibri" panose="020F0502020204030204" pitchFamily="34" charset="0"/>
                         <a:cs typeface="Times New Roman" panose="02020603050405020304" pitchFamily="18" charset="0"/>
                       </a:endParaRPr>
@@ -15431,119 +15644,157 @@
                     <a:lstStyle/>
                     <a:p>
                       <a:r>
-                        <a:rPr lang="fr-CM" sz="1100" dirty="0">
+                        <a:rPr lang="fr-CM" sz="1200" dirty="0">
                           <a:effectLst/>
+                          <a:latin typeface="Times New Roman" panose="02020603050405020304" pitchFamily="18" charset="0"/>
+                          <a:cs typeface="Times New Roman" panose="02020603050405020304" pitchFamily="18" charset="0"/>
                         </a:rPr>
                         <a:t>1. Le Noyau Linux met à jour les fichiers virtuels en mémoire RAM.</a:t>
                       </a:r>
-                      <a:endParaRPr lang="en-US" sz="1100" dirty="0">
+                      <a:endParaRPr lang="en-US" sz="1200" dirty="0">
                         <a:effectLst/>
+                        <a:latin typeface="Times New Roman" panose="02020603050405020304" pitchFamily="18" charset="0"/>
+                        <a:cs typeface="Times New Roman" panose="02020603050405020304" pitchFamily="18" charset="0"/>
                       </a:endParaRPr>
                     </a:p>
                     <a:p>
                       <a:r>
-                        <a:rPr lang="fr-CM" sz="1100" dirty="0">
+                        <a:rPr lang="fr-CM" sz="1200" dirty="0">
                           <a:effectLst/>
+                          <a:latin typeface="Times New Roman" panose="02020603050405020304" pitchFamily="18" charset="0"/>
+                          <a:cs typeface="Times New Roman" panose="02020603050405020304" pitchFamily="18" charset="0"/>
                         </a:rPr>
                         <a:t>2. Le module de collecte </a:t>
                       </a:r>
                       <a:r>
-                        <a:rPr lang="fr-CM" sz="1100" dirty="0" smtClean="0">
+                        <a:rPr lang="fr-CM" sz="1200" dirty="0" smtClean="0">
                           <a:effectLst/>
+                          <a:latin typeface="Times New Roman" panose="02020603050405020304" pitchFamily="18" charset="0"/>
+                          <a:cs typeface="Times New Roman" panose="02020603050405020304" pitchFamily="18" charset="0"/>
                         </a:rPr>
                         <a:t>EBPF</a:t>
                       </a:r>
                       <a:r>
-                        <a:rPr lang="fr-CM" sz="1100" baseline="0" dirty="0" smtClean="0">
+                        <a:rPr lang="fr-CM" sz="1200" baseline="0" dirty="0" smtClean="0">
                           <a:effectLst/>
+                          <a:latin typeface="Times New Roman" panose="02020603050405020304" pitchFamily="18" charset="0"/>
+                          <a:cs typeface="Times New Roman" panose="02020603050405020304" pitchFamily="18" charset="0"/>
                         </a:rPr>
                         <a:t> capture les performances du CPU</a:t>
                       </a:r>
                       <a:r>
-                        <a:rPr lang="fr-CM" sz="1100" dirty="0" smtClean="0">
+                        <a:rPr lang="fr-CM" sz="1200" dirty="0" smtClean="0">
                           <a:effectLst/>
+                          <a:latin typeface="Times New Roman" panose="02020603050405020304" pitchFamily="18" charset="0"/>
+                          <a:cs typeface="Times New Roman" panose="02020603050405020304" pitchFamily="18" charset="0"/>
                         </a:rPr>
                         <a:t>.</a:t>
                       </a:r>
-                      <a:endParaRPr lang="en-US" sz="1100" dirty="0">
+                      <a:endParaRPr lang="en-US" sz="1200" dirty="0">
                         <a:effectLst/>
+                        <a:latin typeface="Times New Roman" panose="02020603050405020304" pitchFamily="18" charset="0"/>
+                        <a:cs typeface="Times New Roman" panose="02020603050405020304" pitchFamily="18" charset="0"/>
                       </a:endParaRPr>
                     </a:p>
                     <a:p>
                       <a:r>
-                        <a:rPr lang="fr-CM" sz="1100" dirty="0" smtClean="0">
+                        <a:rPr lang="fr-CM" sz="1200" dirty="0" smtClean="0">
                           <a:effectLst/>
+                          <a:latin typeface="Times New Roman" panose="02020603050405020304" pitchFamily="18" charset="0"/>
+                          <a:cs typeface="Times New Roman" panose="02020603050405020304" pitchFamily="18" charset="0"/>
                         </a:rPr>
                         <a:t>4</a:t>
                       </a:r>
                       <a:r>
-                        <a:rPr lang="fr-CM" sz="1100" dirty="0">
+                        <a:rPr lang="fr-CM" sz="1200" dirty="0">
                           <a:effectLst/>
+                          <a:latin typeface="Times New Roman" panose="02020603050405020304" pitchFamily="18" charset="0"/>
+                          <a:cs typeface="Times New Roman" panose="02020603050405020304" pitchFamily="18" charset="0"/>
                         </a:rPr>
                         <a:t>. Le </a:t>
                       </a:r>
                       <a:r>
-                        <a:rPr lang="fr-CM" sz="1100" dirty="0" smtClean="0">
+                        <a:rPr lang="fr-CM" sz="1200" dirty="0" smtClean="0">
                           <a:effectLst/>
+                          <a:latin typeface="Times New Roman" panose="02020603050405020304" pitchFamily="18" charset="0"/>
+                          <a:cs typeface="Times New Roman" panose="02020603050405020304" pitchFamily="18" charset="0"/>
                         </a:rPr>
                         <a:t>module</a:t>
                       </a:r>
                       <a:r>
-                        <a:rPr lang="fr-CM" sz="1100" baseline="0" dirty="0" smtClean="0">
+                        <a:rPr lang="fr-CM" sz="1200" baseline="0" dirty="0" smtClean="0">
                           <a:effectLst/>
+                          <a:latin typeface="Times New Roman" panose="02020603050405020304" pitchFamily="18" charset="0"/>
+                          <a:cs typeface="Times New Roman" panose="02020603050405020304" pitchFamily="18" charset="0"/>
                         </a:rPr>
                         <a:t> de collecte EBPF </a:t>
                       </a:r>
                       <a:r>
-                        <a:rPr lang="fr-CM" sz="1100" dirty="0" smtClean="0">
+                        <a:rPr lang="fr-CM" sz="1200" dirty="0" smtClean="0">
                           <a:effectLst/>
+                          <a:latin typeface="Times New Roman" panose="02020603050405020304" pitchFamily="18" charset="0"/>
+                          <a:cs typeface="Times New Roman" panose="02020603050405020304" pitchFamily="18" charset="0"/>
                         </a:rPr>
                         <a:t> </a:t>
                       </a:r>
                       <a:r>
-                        <a:rPr lang="fr-CM" sz="1100" dirty="0">
+                        <a:rPr lang="fr-CM" sz="1200" dirty="0">
                           <a:effectLst/>
+                          <a:latin typeface="Times New Roman" panose="02020603050405020304" pitchFamily="18" charset="0"/>
+                          <a:cs typeface="Times New Roman" panose="02020603050405020304" pitchFamily="18" charset="0"/>
                         </a:rPr>
                         <a:t>extrait </a:t>
                       </a:r>
                       <a:r>
-                        <a:rPr lang="fr-CM" sz="1100" dirty="0" smtClean="0">
+                        <a:rPr lang="fr-CM" sz="1200" dirty="0" smtClean="0">
                           <a:effectLst/>
+                          <a:latin typeface="Times New Roman" panose="02020603050405020304" pitchFamily="18" charset="0"/>
+                          <a:cs typeface="Times New Roman" panose="02020603050405020304" pitchFamily="18" charset="0"/>
                         </a:rPr>
                         <a:t> (capture) les </a:t>
                       </a:r>
                       <a:r>
-                        <a:rPr lang="fr-CM" sz="1100" dirty="0">
+                        <a:rPr lang="fr-CM" sz="1200" dirty="0">
                           <a:effectLst/>
+                          <a:latin typeface="Times New Roman" panose="02020603050405020304" pitchFamily="18" charset="0"/>
+                          <a:cs typeface="Times New Roman" panose="02020603050405020304" pitchFamily="18" charset="0"/>
                         </a:rPr>
                         <a:t>fréquences </a:t>
                       </a:r>
                       <a:r>
-                        <a:rPr lang="fr-CM" sz="1100" dirty="0" smtClean="0">
+                        <a:rPr lang="fr-CM" sz="1200" dirty="0" smtClean="0">
                           <a:effectLst/>
+                          <a:latin typeface="Times New Roman" panose="02020603050405020304" pitchFamily="18" charset="0"/>
+                          <a:cs typeface="Times New Roman" panose="02020603050405020304" pitchFamily="18" charset="0"/>
                         </a:rPr>
                         <a:t>actuelles depuis en</a:t>
                       </a:r>
                       <a:r>
-                        <a:rPr lang="fr-CM" sz="1100" baseline="0" dirty="0" smtClean="0">
+                        <a:rPr lang="fr-CM" sz="1200" baseline="0" dirty="0" smtClean="0">
                           <a:effectLst/>
+                          <a:latin typeface="Times New Roman" panose="02020603050405020304" pitchFamily="18" charset="0"/>
+                          <a:cs typeface="Times New Roman" panose="02020603050405020304" pitchFamily="18" charset="0"/>
                         </a:rPr>
                         <a:t> interagissant avec le noyau</a:t>
                       </a:r>
-                      <a:endParaRPr lang="en-US" sz="1100" dirty="0">
+                      <a:endParaRPr lang="en-US" sz="1200" dirty="0">
                         <a:effectLst/>
+                        <a:latin typeface="Times New Roman" panose="02020603050405020304" pitchFamily="18" charset="0"/>
+                        <a:cs typeface="Times New Roman" panose="02020603050405020304" pitchFamily="18" charset="0"/>
                       </a:endParaRPr>
                     </a:p>
                     <a:p>
                       <a:r>
-                        <a:rPr lang="fr-CM" sz="1100" dirty="0">
+                        <a:rPr lang="fr-CM" sz="1200" dirty="0">
                           <a:effectLst/>
+                          <a:latin typeface="Times New Roman" panose="02020603050405020304" pitchFamily="18" charset="0"/>
+                          <a:cs typeface="Times New Roman" panose="02020603050405020304" pitchFamily="18" charset="0"/>
                         </a:rPr>
                         <a:t>5. Le Noyau transmet ce flux de données brutes vers le tampon (buffer) de l'application.</a:t>
                       </a:r>
-                      <a:endParaRPr lang="en-US" sz="1100" dirty="0">
+                      <a:endParaRPr lang="en-US" sz="1200" dirty="0">
                         <a:effectLst/>
-                        <a:latin typeface="Calibri" panose="020F0502020204030204" pitchFamily="34" charset="0"/>
+                        <a:latin typeface="Times New Roman" panose="02020603050405020304" pitchFamily="18" charset="0"/>
                         <a:ea typeface="Times New Roman" panose="02020603050405020304" pitchFamily="18" charset="0"/>
                         <a:cs typeface="Times New Roman" panose="02020603050405020304" pitchFamily="18" charset="0"/>
                       </a:endParaRPr>
@@ -15572,14 +15823,16 @@
                         </a:spcAft>
                       </a:pPr>
                       <a:r>
-                        <a:rPr lang="fr-FR" sz="1100">
+                        <a:rPr lang="fr-FR" sz="1200">
                           <a:effectLst/>
+                          <a:latin typeface="Times New Roman" panose="02020603050405020304" pitchFamily="18" charset="0"/>
+                          <a:cs typeface="Times New Roman" panose="02020603050405020304" pitchFamily="18" charset="0"/>
                         </a:rPr>
                         <a:t>Scénario Alternatif / Exception</a:t>
                       </a:r>
-                      <a:endParaRPr lang="en-US" sz="1100">
+                      <a:endParaRPr lang="en-US" sz="1200">
                         <a:effectLst/>
-                        <a:latin typeface="Calibri" panose="020F0502020204030204" pitchFamily="34" charset="0"/>
+                        <a:latin typeface="Times New Roman" panose="02020603050405020304" pitchFamily="18" charset="0"/>
                         <a:ea typeface="Calibri" panose="020F0502020204030204" pitchFamily="34" charset="0"/>
                         <a:cs typeface="Times New Roman" panose="02020603050405020304" pitchFamily="18" charset="0"/>
                       </a:endParaRPr>
@@ -15593,37 +15846,49 @@
                     <a:lstStyle/>
                     <a:p>
                       <a:r>
-                        <a:rPr lang="fr-CM" sz="1100" b="1" dirty="0" smtClean="0">
+                        <a:rPr lang="fr-CM" sz="1200" b="1" dirty="0" smtClean="0">
                           <a:effectLst/>
+                          <a:latin typeface="Times New Roman" panose="02020603050405020304" pitchFamily="18" charset="0"/>
+                          <a:cs typeface="Times New Roman" panose="02020603050405020304" pitchFamily="18" charset="0"/>
                         </a:rPr>
                         <a:t>S1</a:t>
                       </a:r>
                       <a:r>
-                        <a:rPr lang="fr-CM" sz="1100" b="1" dirty="0">
+                        <a:rPr lang="fr-CM" sz="1200" b="1" dirty="0">
                           <a:effectLst/>
+                          <a:latin typeface="Times New Roman" panose="02020603050405020304" pitchFamily="18" charset="0"/>
+                          <a:cs typeface="Times New Roman" panose="02020603050405020304" pitchFamily="18" charset="0"/>
                         </a:rPr>
                         <a:t>. </a:t>
                       </a:r>
                       <a:r>
-                        <a:rPr lang="fr-CM" sz="1100" dirty="0">
+                        <a:rPr lang="fr-CM" sz="1200" dirty="0">
                           <a:effectLst/>
+                          <a:latin typeface="Times New Roman" panose="02020603050405020304" pitchFamily="18" charset="0"/>
+                          <a:cs typeface="Times New Roman" panose="02020603050405020304" pitchFamily="18" charset="0"/>
                         </a:rPr>
                         <a:t>Fichier verrouillé ou absent : Si une ressource système est temporairement indisponible, le Noyau renvoie une erreur d'E/S (Input/Output </a:t>
                       </a:r>
                       <a:r>
-                        <a:rPr lang="fr-CM" sz="1100" dirty="0" err="1">
+                        <a:rPr lang="fr-CM" sz="1200" dirty="0" err="1">
                           <a:effectLst/>
+                          <a:latin typeface="Times New Roman" panose="02020603050405020304" pitchFamily="18" charset="0"/>
+                          <a:cs typeface="Times New Roman" panose="02020603050405020304" pitchFamily="18" charset="0"/>
                         </a:rPr>
                         <a:t>error</a:t>
                       </a:r>
                       <a:r>
-                        <a:rPr lang="fr-CM" sz="1100" dirty="0">
+                        <a:rPr lang="fr-CM" sz="1200" dirty="0">
                           <a:effectLst/>
+                          <a:latin typeface="Times New Roman" panose="02020603050405020304" pitchFamily="18" charset="0"/>
+                          <a:cs typeface="Times New Roman" panose="02020603050405020304" pitchFamily="18" charset="0"/>
                         </a:rPr>
                         <a:t>).</a:t>
                       </a:r>
-                      <a:endParaRPr lang="en-US" sz="1100" dirty="0">
+                      <a:endParaRPr lang="en-US" sz="1200" dirty="0">
                         <a:effectLst/>
+                        <a:latin typeface="Times New Roman" panose="02020603050405020304" pitchFamily="18" charset="0"/>
+                        <a:cs typeface="Times New Roman" panose="02020603050405020304" pitchFamily="18" charset="0"/>
                       </a:endParaRPr>
                     </a:p>
                     <a:p>
@@ -15636,37 +15901,49 @@
                         </a:spcAft>
                       </a:pPr>
                       <a:r>
-                        <a:rPr lang="fr-CM" sz="1100" b="1" dirty="0" smtClean="0">
+                        <a:rPr lang="fr-CM" sz="1200" b="1" dirty="0" smtClean="0">
                           <a:effectLst/>
+                          <a:latin typeface="Times New Roman" panose="02020603050405020304" pitchFamily="18" charset="0"/>
+                          <a:cs typeface="Times New Roman" panose="02020603050405020304" pitchFamily="18" charset="0"/>
                         </a:rPr>
                         <a:t>S2</a:t>
                       </a:r>
                       <a:r>
-                        <a:rPr lang="fr-CM" sz="1100" dirty="0">
+                        <a:rPr lang="fr-CM" sz="1200" dirty="0">
                           <a:effectLst/>
+                          <a:latin typeface="Times New Roman" panose="02020603050405020304" pitchFamily="18" charset="0"/>
+                          <a:cs typeface="Times New Roman" panose="02020603050405020304" pitchFamily="18" charset="0"/>
                         </a:rPr>
                         <a:t>. Données </a:t>
                       </a:r>
                       <a:r>
-                        <a:rPr lang="fr-CM" sz="1100" dirty="0" err="1">
+                        <a:rPr lang="fr-CM" sz="1200" dirty="0" err="1">
                           <a:effectLst/>
+                          <a:latin typeface="Times New Roman" panose="02020603050405020304" pitchFamily="18" charset="0"/>
+                          <a:cs typeface="Times New Roman" panose="02020603050405020304" pitchFamily="18" charset="0"/>
                         </a:rPr>
                         <a:t>non-mises</a:t>
                       </a:r>
                       <a:r>
-                        <a:rPr lang="fr-CM" sz="1100" dirty="0">
+                        <a:rPr lang="fr-CM" sz="1200" dirty="0">
                           <a:effectLst/>
+                          <a:latin typeface="Times New Roman" panose="02020603050405020304" pitchFamily="18" charset="0"/>
+                          <a:cs typeface="Times New Roman" panose="02020603050405020304" pitchFamily="18" charset="0"/>
                         </a:rPr>
                         <a:t> à jour : Si le processeur est dans un état de sommeil profond (C-State), le Noyau peut renvoyer des valeurs identiques au cycle précédent</a:t>
                       </a:r>
                       <a:r>
-                        <a:rPr lang="fr-CM" sz="1100" dirty="0" smtClean="0">
+                        <a:rPr lang="fr-CM" sz="1200" dirty="0" smtClean="0">
                           <a:effectLst/>
+                          <a:latin typeface="Times New Roman" panose="02020603050405020304" pitchFamily="18" charset="0"/>
+                          <a:cs typeface="Times New Roman" panose="02020603050405020304" pitchFamily="18" charset="0"/>
                         </a:rPr>
                         <a:t>.</a:t>
                       </a:r>
-                      <a:endParaRPr lang="en-US" sz="1100" dirty="0">
+                      <a:endParaRPr lang="en-US" sz="1200" dirty="0">
                         <a:effectLst/>
+                        <a:latin typeface="Times New Roman" panose="02020603050405020304" pitchFamily="18" charset="0"/>
+                        <a:cs typeface="Times New Roman" panose="02020603050405020304" pitchFamily="18" charset="0"/>
                       </a:endParaRPr>
                     </a:p>
                   </a:txBody>
@@ -15693,14 +15970,16 @@
                         </a:spcAft>
                       </a:pPr>
                       <a:r>
-                        <a:rPr lang="fr-FR" sz="1100">
+                        <a:rPr lang="fr-FR" sz="1200">
                           <a:effectLst/>
+                          <a:latin typeface="Times New Roman" panose="02020603050405020304" pitchFamily="18" charset="0"/>
+                          <a:cs typeface="Times New Roman" panose="02020603050405020304" pitchFamily="18" charset="0"/>
                         </a:rPr>
                         <a:t>Post-condition</a:t>
                       </a:r>
-                      <a:endParaRPr lang="en-US" sz="1100">
+                      <a:endParaRPr lang="en-US" sz="1200">
                         <a:effectLst/>
-                        <a:latin typeface="Calibri" panose="020F0502020204030204" pitchFamily="34" charset="0"/>
+                        <a:latin typeface="Times New Roman" panose="02020603050405020304" pitchFamily="18" charset="0"/>
                         <a:ea typeface="Calibri" panose="020F0502020204030204" pitchFamily="34" charset="0"/>
                         <a:cs typeface="Times New Roman" panose="02020603050405020304" pitchFamily="18" charset="0"/>
                       </a:endParaRPr>
@@ -15722,14 +16001,16 @@
                         </a:spcAft>
                       </a:pPr>
                       <a:r>
-                        <a:rPr lang="fr-FR" sz="1100" dirty="0">
+                        <a:rPr lang="fr-FR" sz="1200" dirty="0">
                           <a:effectLst/>
+                          <a:latin typeface="Times New Roman" panose="02020603050405020304" pitchFamily="18" charset="0"/>
+                          <a:cs typeface="Times New Roman" panose="02020603050405020304" pitchFamily="18" charset="0"/>
                         </a:rPr>
                         <a:t>Une structure de données brutes est chargée en mémoire, prête à être traitée par les algorithmes de calcul de l'application.</a:t>
                       </a:r>
-                      <a:endParaRPr lang="en-US" sz="1100" dirty="0">
+                      <a:endParaRPr lang="en-US" sz="1200" dirty="0">
                         <a:effectLst/>
-                        <a:latin typeface="Calibri" panose="020F0502020204030204" pitchFamily="34" charset="0"/>
+                        <a:latin typeface="Times New Roman" panose="02020603050405020304" pitchFamily="18" charset="0"/>
                         <a:ea typeface="Calibri" panose="020F0502020204030204" pitchFamily="34" charset="0"/>
                         <a:cs typeface="Times New Roman" panose="02020603050405020304" pitchFamily="18" charset="0"/>
                       </a:endParaRPr>
@@ -15793,7 +16074,7 @@
           <p:nvPr>
             <p:extLst>
               <p:ext uri="{D42A27DB-BD31-4B8C-83A1-F6EECF244321}">
-                <p14:modId xmlns:p14="http://schemas.microsoft.com/office/powerpoint/2010/main" val="135119652"/>
+                <p14:modId xmlns:p14="http://schemas.microsoft.com/office/powerpoint/2010/main" val="687895630"/>
               </p:ext>
             </p:extLst>
           </p:nvPr>
@@ -15839,14 +16120,16 @@
                         </a:spcAft>
                       </a:pPr>
                       <a:r>
-                        <a:rPr lang="fr-FR" sz="1100">
+                        <a:rPr lang="fr-FR" sz="1200">
                           <a:effectLst/>
+                          <a:latin typeface="Times New Roman" panose="02020603050405020304" pitchFamily="18" charset="0"/>
+                          <a:cs typeface="Times New Roman" panose="02020603050405020304" pitchFamily="18" charset="0"/>
                         </a:rPr>
                         <a:t>Nom du Cas</a:t>
                       </a:r>
-                      <a:endParaRPr lang="en-US" sz="1100">
+                      <a:endParaRPr lang="en-US" sz="1200">
                         <a:effectLst/>
-                        <a:latin typeface="Calibri" panose="020F0502020204030204" pitchFamily="34" charset="0"/>
+                        <a:latin typeface="Times New Roman" panose="02020603050405020304" pitchFamily="18" charset="0"/>
                         <a:ea typeface="Calibri" panose="020F0502020204030204" pitchFamily="34" charset="0"/>
                         <a:cs typeface="Times New Roman" panose="02020603050405020304" pitchFamily="18" charset="0"/>
                       </a:endParaRPr>
@@ -15868,14 +16151,16 @@
                         </a:spcAft>
                       </a:pPr>
                       <a:r>
-                        <a:rPr lang="fr-FR" sz="1100">
+                        <a:rPr lang="fr-FR" sz="1200">
                           <a:effectLst/>
+                          <a:latin typeface="Times New Roman" panose="02020603050405020304" pitchFamily="18" charset="0"/>
+                          <a:cs typeface="Times New Roman" panose="02020603050405020304" pitchFamily="18" charset="0"/>
                         </a:rPr>
                         <a:t>Exporter les rapports de performance.</a:t>
                       </a:r>
-                      <a:endParaRPr lang="en-US" sz="1100">
+                      <a:endParaRPr lang="en-US" sz="1200">
                         <a:effectLst/>
-                        <a:latin typeface="Calibri" panose="020F0502020204030204" pitchFamily="34" charset="0"/>
+                        <a:latin typeface="Times New Roman" panose="02020603050405020304" pitchFamily="18" charset="0"/>
                         <a:ea typeface="Calibri" panose="020F0502020204030204" pitchFamily="34" charset="0"/>
                         <a:cs typeface="Times New Roman" panose="02020603050405020304" pitchFamily="18" charset="0"/>
                       </a:endParaRPr>
@@ -15904,14 +16189,16 @@
                         </a:spcAft>
                       </a:pPr>
                       <a:r>
-                        <a:rPr lang="fr-FR" sz="1100">
+                        <a:rPr lang="fr-FR" sz="1200">
                           <a:effectLst/>
+                          <a:latin typeface="Times New Roman" panose="02020603050405020304" pitchFamily="18" charset="0"/>
+                          <a:cs typeface="Times New Roman" panose="02020603050405020304" pitchFamily="18" charset="0"/>
                         </a:rPr>
                         <a:t>Objectif du Cas</a:t>
                       </a:r>
-                      <a:endParaRPr lang="en-US" sz="1100">
+                      <a:endParaRPr lang="en-US" sz="1200">
                         <a:effectLst/>
-                        <a:latin typeface="Calibri" panose="020F0502020204030204" pitchFamily="34" charset="0"/>
+                        <a:latin typeface="Times New Roman" panose="02020603050405020304" pitchFamily="18" charset="0"/>
                         <a:ea typeface="Calibri" panose="020F0502020204030204" pitchFamily="34" charset="0"/>
                         <a:cs typeface="Times New Roman" panose="02020603050405020304" pitchFamily="18" charset="0"/>
                       </a:endParaRPr>
@@ -15933,14 +16220,16 @@
                         </a:spcAft>
                       </a:pPr>
                       <a:r>
-                        <a:rPr lang="fr-FR" sz="1100">
+                        <a:rPr lang="fr-FR" sz="1200">
                           <a:effectLst/>
+                          <a:latin typeface="Times New Roman" panose="02020603050405020304" pitchFamily="18" charset="0"/>
+                          <a:cs typeface="Times New Roman" panose="02020603050405020304" pitchFamily="18" charset="0"/>
                         </a:rPr>
                         <a:t>Permettre à l'utilisateur de sauvegarder les données de monitoring accumulées dans un fichier permanent pour analyse ou archivage.</a:t>
                       </a:r>
-                      <a:endParaRPr lang="en-US" sz="1100">
+                      <a:endParaRPr lang="en-US" sz="1200">
                         <a:effectLst/>
-                        <a:latin typeface="Calibri" panose="020F0502020204030204" pitchFamily="34" charset="0"/>
+                        <a:latin typeface="Times New Roman" panose="02020603050405020304" pitchFamily="18" charset="0"/>
                         <a:ea typeface="Calibri" panose="020F0502020204030204" pitchFamily="34" charset="0"/>
                         <a:cs typeface="Times New Roman" panose="02020603050405020304" pitchFamily="18" charset="0"/>
                       </a:endParaRPr>
@@ -15969,14 +16258,16 @@
                         </a:spcAft>
                       </a:pPr>
                       <a:r>
-                        <a:rPr lang="fr-FR" sz="1100">
+                        <a:rPr lang="fr-FR" sz="1200">
                           <a:effectLst/>
+                          <a:latin typeface="Times New Roman" panose="02020603050405020304" pitchFamily="18" charset="0"/>
+                          <a:cs typeface="Times New Roman" panose="02020603050405020304" pitchFamily="18" charset="0"/>
                         </a:rPr>
                         <a:t>Acteurs</a:t>
                       </a:r>
-                      <a:endParaRPr lang="en-US" sz="1100">
+                      <a:endParaRPr lang="en-US" sz="1200">
                         <a:effectLst/>
-                        <a:latin typeface="Calibri" panose="020F0502020204030204" pitchFamily="34" charset="0"/>
+                        <a:latin typeface="Times New Roman" panose="02020603050405020304" pitchFamily="18" charset="0"/>
                         <a:ea typeface="Calibri" panose="020F0502020204030204" pitchFamily="34" charset="0"/>
                         <a:cs typeface="Times New Roman" panose="02020603050405020304" pitchFamily="18" charset="0"/>
                       </a:endParaRPr>
@@ -15998,13 +16289,17 @@
                         </a:spcAft>
                       </a:pPr>
                       <a:r>
-                        <a:rPr lang="fr-CM" sz="1100">
+                        <a:rPr lang="fr-CM" sz="1200">
                           <a:effectLst/>
+                          <a:latin typeface="Times New Roman" panose="02020603050405020304" pitchFamily="18" charset="0"/>
+                          <a:cs typeface="Times New Roman" panose="02020603050405020304" pitchFamily="18" charset="0"/>
                         </a:rPr>
                         <a:t>Principal : Utilisateur Standard ou Administrateur. </a:t>
                       </a:r>
-                      <a:endParaRPr lang="en-US" sz="1100">
+                      <a:endParaRPr lang="en-US" sz="1200">
                         <a:effectLst/>
+                        <a:latin typeface="Times New Roman" panose="02020603050405020304" pitchFamily="18" charset="0"/>
+                        <a:cs typeface="Times New Roman" panose="02020603050405020304" pitchFamily="18" charset="0"/>
                       </a:endParaRPr>
                     </a:p>
                     <a:p>
@@ -16017,14 +16312,16 @@
                         </a:spcAft>
                       </a:pPr>
                       <a:r>
-                        <a:rPr lang="fr-CM" sz="1100">
+                        <a:rPr lang="fr-CM" sz="1200">
                           <a:effectLst/>
+                          <a:latin typeface="Times New Roman" panose="02020603050405020304" pitchFamily="18" charset="0"/>
+                          <a:cs typeface="Times New Roman" panose="02020603050405020304" pitchFamily="18" charset="0"/>
                         </a:rPr>
                         <a:t>Secondaire : Système de fichiers (Stockage local).</a:t>
                       </a:r>
-                      <a:endParaRPr lang="en-US" sz="1100">
+                      <a:endParaRPr lang="en-US" sz="1200">
                         <a:effectLst/>
-                        <a:latin typeface="Calibri" panose="020F0502020204030204" pitchFamily="34" charset="0"/>
+                        <a:latin typeface="Times New Roman" panose="02020603050405020304" pitchFamily="18" charset="0"/>
                         <a:ea typeface="Calibri" panose="020F0502020204030204" pitchFamily="34" charset="0"/>
                         <a:cs typeface="Times New Roman" panose="02020603050405020304" pitchFamily="18" charset="0"/>
                       </a:endParaRPr>
@@ -16053,14 +16350,16 @@
                         </a:spcAft>
                       </a:pPr>
                       <a:r>
-                        <a:rPr lang="fr-FR" sz="1100">
+                        <a:rPr lang="fr-FR" sz="1200" dirty="0" err="1">
                           <a:effectLst/>
+                          <a:latin typeface="Times New Roman" panose="02020603050405020304" pitchFamily="18" charset="0"/>
+                          <a:cs typeface="Times New Roman" panose="02020603050405020304" pitchFamily="18" charset="0"/>
                         </a:rPr>
                         <a:t>Pré-supposés</a:t>
                       </a:r>
-                      <a:endParaRPr lang="en-US" sz="1100">
+                      <a:endParaRPr lang="en-US" sz="1200" dirty="0">
                         <a:effectLst/>
-                        <a:latin typeface="Calibri" panose="020F0502020204030204" pitchFamily="34" charset="0"/>
+                        <a:latin typeface="Times New Roman" panose="02020603050405020304" pitchFamily="18" charset="0"/>
                         <a:ea typeface="Calibri" panose="020F0502020204030204" pitchFamily="34" charset="0"/>
                         <a:cs typeface="Times New Roman" panose="02020603050405020304" pitchFamily="18" charset="0"/>
                       </a:endParaRPr>
@@ -16082,13 +16381,17 @@
                         </a:spcAft>
                       </a:pPr>
                       <a:r>
-                        <a:rPr lang="fr-CM" sz="1100">
+                        <a:rPr lang="fr-CM" sz="1200">
                           <a:effectLst/>
+                          <a:latin typeface="Times New Roman" panose="02020603050405020304" pitchFamily="18" charset="0"/>
+                          <a:cs typeface="Times New Roman" panose="02020603050405020304" pitchFamily="18" charset="0"/>
                         </a:rPr>
                         <a:t>1. L'application est active et a collecté des données en mémoire vive (RAM). </a:t>
                       </a:r>
-                      <a:endParaRPr lang="en-US" sz="1100">
+                      <a:endParaRPr lang="en-US" sz="1200">
                         <a:effectLst/>
+                        <a:latin typeface="Times New Roman" panose="02020603050405020304" pitchFamily="18" charset="0"/>
+                        <a:cs typeface="Times New Roman" panose="02020603050405020304" pitchFamily="18" charset="0"/>
                       </a:endParaRPr>
                     </a:p>
                     <a:p>
@@ -16101,14 +16404,16 @@
                         </a:spcAft>
                       </a:pPr>
                       <a:r>
-                        <a:rPr lang="fr-CM" sz="1100">
+                        <a:rPr lang="fr-CM" sz="1200">
                           <a:effectLst/>
+                          <a:latin typeface="Times New Roman" panose="02020603050405020304" pitchFamily="18" charset="0"/>
+                          <a:cs typeface="Times New Roman" panose="02020603050405020304" pitchFamily="18" charset="0"/>
                         </a:rPr>
                         <a:t>2. Le support de stockage est monté et accessible sous openSUSE.</a:t>
                       </a:r>
-                      <a:endParaRPr lang="en-US" sz="1100">
+                      <a:endParaRPr lang="en-US" sz="1200">
                         <a:effectLst/>
-                        <a:latin typeface="Calibri" panose="020F0502020204030204" pitchFamily="34" charset="0"/>
+                        <a:latin typeface="Times New Roman" panose="02020603050405020304" pitchFamily="18" charset="0"/>
                         <a:ea typeface="Calibri" panose="020F0502020204030204" pitchFamily="34" charset="0"/>
                         <a:cs typeface="Times New Roman" panose="02020603050405020304" pitchFamily="18" charset="0"/>
                       </a:endParaRPr>
@@ -16137,14 +16442,16 @@
                         </a:spcAft>
                       </a:pPr>
                       <a:r>
-                        <a:rPr lang="fr-FR" sz="1100">
+                        <a:rPr lang="fr-FR" sz="1200">
                           <a:effectLst/>
+                          <a:latin typeface="Times New Roman" panose="02020603050405020304" pitchFamily="18" charset="0"/>
+                          <a:cs typeface="Times New Roman" panose="02020603050405020304" pitchFamily="18" charset="0"/>
                         </a:rPr>
                         <a:t>Pré-condition</a:t>
                       </a:r>
-                      <a:endParaRPr lang="en-US" sz="1100">
+                      <a:endParaRPr lang="en-US" sz="1200">
                         <a:effectLst/>
-                        <a:latin typeface="Calibri" panose="020F0502020204030204" pitchFamily="34" charset="0"/>
+                        <a:latin typeface="Times New Roman" panose="02020603050405020304" pitchFamily="18" charset="0"/>
                         <a:ea typeface="Calibri" panose="020F0502020204030204" pitchFamily="34" charset="0"/>
                         <a:cs typeface="Times New Roman" panose="02020603050405020304" pitchFamily="18" charset="0"/>
                       </a:endParaRPr>
@@ -16166,14 +16473,16 @@
                         </a:spcAft>
                       </a:pPr>
                       <a:r>
-                        <a:rPr lang="fr-FR" sz="1100">
+                        <a:rPr lang="fr-FR" sz="1200">
                           <a:effectLst/>
+                          <a:latin typeface="Times New Roman" panose="02020603050405020304" pitchFamily="18" charset="0"/>
+                          <a:cs typeface="Times New Roman" panose="02020603050405020304" pitchFamily="18" charset="0"/>
                         </a:rPr>
                         <a:t>L'utilisateur a accédé à la section "Historique" ou "Rapports" de l'interface graphique.</a:t>
                       </a:r>
-                      <a:endParaRPr lang="en-US" sz="1100">
+                      <a:endParaRPr lang="en-US" sz="1200">
                         <a:effectLst/>
-                        <a:latin typeface="Calibri" panose="020F0502020204030204" pitchFamily="34" charset="0"/>
+                        <a:latin typeface="Times New Roman" panose="02020603050405020304" pitchFamily="18" charset="0"/>
                         <a:ea typeface="Calibri" panose="020F0502020204030204" pitchFamily="34" charset="0"/>
                         <a:cs typeface="Times New Roman" panose="02020603050405020304" pitchFamily="18" charset="0"/>
                       </a:endParaRPr>
@@ -16202,14 +16511,16 @@
                         </a:spcAft>
                       </a:pPr>
                       <a:r>
-                        <a:rPr lang="fr-FR" sz="1100" dirty="0">
+                        <a:rPr lang="fr-FR" sz="1200" dirty="0">
                           <a:effectLst/>
+                          <a:latin typeface="Times New Roman" panose="02020603050405020304" pitchFamily="18" charset="0"/>
+                          <a:cs typeface="Times New Roman" panose="02020603050405020304" pitchFamily="18" charset="0"/>
                         </a:rPr>
                         <a:t>Scénario Nominal</a:t>
                       </a:r>
-                      <a:endParaRPr lang="en-US" sz="1100" dirty="0">
+                      <a:endParaRPr lang="en-US" sz="1200" dirty="0">
                         <a:effectLst/>
-                        <a:latin typeface="Calibri" panose="020F0502020204030204" pitchFamily="34" charset="0"/>
+                        <a:latin typeface="Times New Roman" panose="02020603050405020304" pitchFamily="18" charset="0"/>
                         <a:ea typeface="Calibri" panose="020F0502020204030204" pitchFamily="34" charset="0"/>
                         <a:cs typeface="Times New Roman" panose="02020603050405020304" pitchFamily="18" charset="0"/>
                       </a:endParaRPr>
@@ -16231,13 +16542,17 @@
                         </a:spcAft>
                       </a:pPr>
                       <a:r>
-                        <a:rPr lang="fr-CM" sz="1100">
+                        <a:rPr lang="fr-CM" sz="1200" dirty="0">
                           <a:effectLst/>
+                          <a:latin typeface="Times New Roman" panose="02020603050405020304" pitchFamily="18" charset="0"/>
+                          <a:cs typeface="Times New Roman" panose="02020603050405020304" pitchFamily="18" charset="0"/>
                         </a:rPr>
                         <a:t>1. L'utilisateur clique sur le bouton "Exporter". </a:t>
                       </a:r>
-                      <a:endParaRPr lang="en-US" sz="1100">
+                      <a:endParaRPr lang="en-US" sz="1200" dirty="0">
                         <a:effectLst/>
+                        <a:latin typeface="Times New Roman" panose="02020603050405020304" pitchFamily="18" charset="0"/>
+                        <a:cs typeface="Times New Roman" panose="02020603050405020304" pitchFamily="18" charset="0"/>
                       </a:endParaRPr>
                     </a:p>
                     <a:p>
@@ -16250,13 +16565,17 @@
                         </a:spcAft>
                       </a:pPr>
                       <a:r>
-                        <a:rPr lang="fr-CM" sz="1100">
+                        <a:rPr lang="fr-CM" sz="1200" dirty="0">
                           <a:effectLst/>
+                          <a:latin typeface="Times New Roman" panose="02020603050405020304" pitchFamily="18" charset="0"/>
+                          <a:cs typeface="Times New Roman" panose="02020603050405020304" pitchFamily="18" charset="0"/>
                         </a:rPr>
                         <a:t>2. Le système affiche une boîte de dialogue pour choisir le format (CSV ou LOG). </a:t>
                       </a:r>
-                      <a:endParaRPr lang="en-US" sz="1100">
+                      <a:endParaRPr lang="en-US" sz="1200" dirty="0">
                         <a:effectLst/>
+                        <a:latin typeface="Times New Roman" panose="02020603050405020304" pitchFamily="18" charset="0"/>
+                        <a:cs typeface="Times New Roman" panose="02020603050405020304" pitchFamily="18" charset="0"/>
                       </a:endParaRPr>
                     </a:p>
                     <a:p>
@@ -16269,13 +16588,17 @@
                         </a:spcAft>
                       </a:pPr>
                       <a:r>
-                        <a:rPr lang="fr-CM" sz="1100">
+                        <a:rPr lang="fr-CM" sz="1200" dirty="0">
                           <a:effectLst/>
+                          <a:latin typeface="Times New Roman" panose="02020603050405020304" pitchFamily="18" charset="0"/>
+                          <a:cs typeface="Times New Roman" panose="02020603050405020304" pitchFamily="18" charset="0"/>
                         </a:rPr>
                         <a:t>3. L'utilisateur sélectionne le répertoire de destination. </a:t>
                       </a:r>
-                      <a:endParaRPr lang="en-US" sz="1100">
+                      <a:endParaRPr lang="en-US" sz="1200" dirty="0">
                         <a:effectLst/>
+                        <a:latin typeface="Times New Roman" panose="02020603050405020304" pitchFamily="18" charset="0"/>
+                        <a:cs typeface="Times New Roman" panose="02020603050405020304" pitchFamily="18" charset="0"/>
                       </a:endParaRPr>
                     </a:p>
                     <a:p>
@@ -16288,13 +16611,17 @@
                         </a:spcAft>
                       </a:pPr>
                       <a:r>
-                        <a:rPr lang="fr-CM" sz="1100">
+                        <a:rPr lang="fr-CM" sz="1200" dirty="0">
                           <a:effectLst/>
+                          <a:latin typeface="Times New Roman" panose="02020603050405020304" pitchFamily="18" charset="0"/>
+                          <a:cs typeface="Times New Roman" panose="02020603050405020304" pitchFamily="18" charset="0"/>
                         </a:rPr>
                         <a:t> </a:t>
                       </a:r>
-                      <a:endParaRPr lang="en-US" sz="1100">
+                      <a:endParaRPr lang="en-US" sz="1200" dirty="0">
                         <a:effectLst/>
+                        <a:latin typeface="Times New Roman" panose="02020603050405020304" pitchFamily="18" charset="0"/>
+                        <a:cs typeface="Times New Roman" panose="02020603050405020304" pitchFamily="18" charset="0"/>
                       </a:endParaRPr>
                     </a:p>
                     <a:p>
@@ -16307,13 +16634,17 @@
                         </a:spcAft>
                       </a:pPr>
                       <a:r>
-                        <a:rPr lang="fr-CM" sz="1100">
+                        <a:rPr lang="fr-CM" sz="1200" dirty="0">
                           <a:effectLst/>
+                          <a:latin typeface="Times New Roman" panose="02020603050405020304" pitchFamily="18" charset="0"/>
+                          <a:cs typeface="Times New Roman" panose="02020603050405020304" pitchFamily="18" charset="0"/>
                         </a:rPr>
                         <a:t>4. Le système convertit les données du tampon mémoire au format choisi. </a:t>
                       </a:r>
-                      <a:endParaRPr lang="en-US" sz="1100">
+                      <a:endParaRPr lang="en-US" sz="1200" dirty="0">
                         <a:effectLst/>
+                        <a:latin typeface="Times New Roman" panose="02020603050405020304" pitchFamily="18" charset="0"/>
+                        <a:cs typeface="Times New Roman" panose="02020603050405020304" pitchFamily="18" charset="0"/>
                       </a:endParaRPr>
                     </a:p>
                     <a:p>
@@ -16326,13 +16657,17 @@
                         </a:spcAft>
                       </a:pPr>
                       <a:r>
-                        <a:rPr lang="fr-CM" sz="1100">
+                        <a:rPr lang="fr-CM" sz="1200" dirty="0">
                           <a:effectLst/>
+                          <a:latin typeface="Times New Roman" panose="02020603050405020304" pitchFamily="18" charset="0"/>
+                          <a:cs typeface="Times New Roman" panose="02020603050405020304" pitchFamily="18" charset="0"/>
                         </a:rPr>
                         <a:t>5. Le système écrit le fichier sur le disque. </a:t>
                       </a:r>
-                      <a:endParaRPr lang="en-US" sz="1100">
+                      <a:endParaRPr lang="en-US" sz="1200" dirty="0">
                         <a:effectLst/>
+                        <a:latin typeface="Times New Roman" panose="02020603050405020304" pitchFamily="18" charset="0"/>
+                        <a:cs typeface="Times New Roman" panose="02020603050405020304" pitchFamily="18" charset="0"/>
                       </a:endParaRPr>
                     </a:p>
                     <a:p>
@@ -16345,14 +16680,16 @@
                         </a:spcAft>
                       </a:pPr>
                       <a:r>
-                        <a:rPr lang="fr-CM" sz="1100">
+                        <a:rPr lang="fr-CM" sz="1200" dirty="0">
                           <a:effectLst/>
+                          <a:latin typeface="Times New Roman" panose="02020603050405020304" pitchFamily="18" charset="0"/>
+                          <a:cs typeface="Times New Roman" panose="02020603050405020304" pitchFamily="18" charset="0"/>
                         </a:rPr>
                         <a:t>6. Une notification confirme le succès de l'opération.</a:t>
                       </a:r>
-                      <a:endParaRPr lang="en-US" sz="1100">
+                      <a:endParaRPr lang="en-US" sz="1200" dirty="0">
                         <a:effectLst/>
-                        <a:latin typeface="Calibri" panose="020F0502020204030204" pitchFamily="34" charset="0"/>
+                        <a:latin typeface="Times New Roman" panose="02020603050405020304" pitchFamily="18" charset="0"/>
                         <a:ea typeface="Calibri" panose="020F0502020204030204" pitchFamily="34" charset="0"/>
                         <a:cs typeface="Times New Roman" panose="02020603050405020304" pitchFamily="18" charset="0"/>
                       </a:endParaRPr>
@@ -16381,14 +16718,16 @@
                         </a:spcAft>
                       </a:pPr>
                       <a:r>
-                        <a:rPr lang="fr-FR" sz="1100">
+                        <a:rPr lang="fr-FR" sz="1200">
                           <a:effectLst/>
+                          <a:latin typeface="Times New Roman" panose="02020603050405020304" pitchFamily="18" charset="0"/>
+                          <a:cs typeface="Times New Roman" panose="02020603050405020304" pitchFamily="18" charset="0"/>
                         </a:rPr>
                         <a:t>Scénario Alternatif / Exception</a:t>
                       </a:r>
-                      <a:endParaRPr lang="en-US" sz="1100">
+                      <a:endParaRPr lang="en-US" sz="1200">
                         <a:effectLst/>
-                        <a:latin typeface="Calibri" panose="020F0502020204030204" pitchFamily="34" charset="0"/>
+                        <a:latin typeface="Times New Roman" panose="02020603050405020304" pitchFamily="18" charset="0"/>
                         <a:ea typeface="Calibri" panose="020F0502020204030204" pitchFamily="34" charset="0"/>
                         <a:cs typeface="Times New Roman" panose="02020603050405020304" pitchFamily="18" charset="0"/>
                       </a:endParaRPr>
@@ -16410,25 +16749,33 @@
                         </a:spcAft>
                       </a:pPr>
                       <a:r>
-                        <a:rPr lang="fr-CM" sz="1100" b="1" dirty="0" smtClean="0">
+                        <a:rPr lang="fr-CM" sz="1200" b="1" dirty="0" smtClean="0">
                           <a:effectLst/>
+                          <a:latin typeface="Times New Roman" panose="02020603050405020304" pitchFamily="18" charset="0"/>
+                          <a:cs typeface="Times New Roman" panose="02020603050405020304" pitchFamily="18" charset="0"/>
                         </a:rPr>
                         <a:t>S1</a:t>
                       </a:r>
                       <a:r>
-                        <a:rPr lang="fr-CM" sz="1100" b="1" dirty="0">
+                        <a:rPr lang="fr-CM" sz="1200" b="1" dirty="0">
                           <a:effectLst/>
+                          <a:latin typeface="Times New Roman" panose="02020603050405020304" pitchFamily="18" charset="0"/>
+                          <a:cs typeface="Times New Roman" panose="02020603050405020304" pitchFamily="18" charset="0"/>
                         </a:rPr>
                         <a:t>. </a:t>
                       </a:r>
                       <a:r>
-                        <a:rPr lang="fr-CM" sz="1100" dirty="0">
+                        <a:rPr lang="fr-CM" sz="1200" dirty="0">
                           <a:effectLst/>
+                          <a:latin typeface="Times New Roman" panose="02020603050405020304" pitchFamily="18" charset="0"/>
+                          <a:cs typeface="Times New Roman" panose="02020603050405020304" pitchFamily="18" charset="0"/>
                         </a:rPr>
                         <a:t>Espace saturé : Si le disque est plein, le système affiche une erreur et annule l'exportation. </a:t>
                       </a:r>
-                      <a:endParaRPr lang="en-US" sz="1100" dirty="0">
+                      <a:endParaRPr lang="en-US" sz="1200" dirty="0">
                         <a:effectLst/>
+                        <a:latin typeface="Times New Roman" panose="02020603050405020304" pitchFamily="18" charset="0"/>
+                        <a:cs typeface="Times New Roman" panose="02020603050405020304" pitchFamily="18" charset="0"/>
                       </a:endParaRPr>
                     </a:p>
                     <a:p>
@@ -16441,26 +16788,32 @@
                         </a:spcAft>
                       </a:pPr>
                       <a:r>
-                        <a:rPr lang="fr-CM" sz="1100" b="1" dirty="0" smtClean="0">
+                        <a:rPr lang="fr-CM" sz="1200" b="1" dirty="0" smtClean="0">
                           <a:effectLst/>
+                          <a:latin typeface="Times New Roman" panose="02020603050405020304" pitchFamily="18" charset="0"/>
+                          <a:cs typeface="Times New Roman" panose="02020603050405020304" pitchFamily="18" charset="0"/>
                         </a:rPr>
                         <a:t>S2. </a:t>
                       </a:r>
                       <a:r>
-                        <a:rPr lang="fr-CM" sz="1100" dirty="0" smtClean="0">
+                        <a:rPr lang="fr-CM" sz="1200" dirty="0" smtClean="0">
                           <a:effectLst/>
+                          <a:latin typeface="Times New Roman" panose="02020603050405020304" pitchFamily="18" charset="0"/>
+                          <a:cs typeface="Times New Roman" panose="02020603050405020304" pitchFamily="18" charset="0"/>
                         </a:rPr>
                         <a:t>Format </a:t>
                       </a:r>
                       <a:r>
-                        <a:rPr lang="fr-CM" sz="1100" dirty="0">
+                        <a:rPr lang="fr-CM" sz="1200" dirty="0">
                           <a:effectLst/>
+                          <a:latin typeface="Times New Roman" panose="02020603050405020304" pitchFamily="18" charset="0"/>
+                          <a:cs typeface="Times New Roman" panose="02020603050405020304" pitchFamily="18" charset="0"/>
                         </a:rPr>
                         <a:t>non supporté : Si l'extension de fichier est invalide, le système impose l'extension .csv par défaut.</a:t>
                       </a:r>
-                      <a:endParaRPr lang="en-US" sz="1100" dirty="0">
+                      <a:endParaRPr lang="en-US" sz="1200" dirty="0">
                         <a:effectLst/>
-                        <a:latin typeface="Calibri" panose="020F0502020204030204" pitchFamily="34" charset="0"/>
+                        <a:latin typeface="Times New Roman" panose="02020603050405020304" pitchFamily="18" charset="0"/>
                         <a:ea typeface="Calibri" panose="020F0502020204030204" pitchFamily="34" charset="0"/>
                         <a:cs typeface="Times New Roman" panose="02020603050405020304" pitchFamily="18" charset="0"/>
                       </a:endParaRPr>
@@ -16489,14 +16842,16 @@
                         </a:spcAft>
                       </a:pPr>
                       <a:r>
-                        <a:rPr lang="fr-FR" sz="1100">
+                        <a:rPr lang="fr-FR" sz="1200">
                           <a:effectLst/>
+                          <a:latin typeface="Times New Roman" panose="02020603050405020304" pitchFamily="18" charset="0"/>
+                          <a:cs typeface="Times New Roman" panose="02020603050405020304" pitchFamily="18" charset="0"/>
                         </a:rPr>
                         <a:t>Post-condition</a:t>
                       </a:r>
-                      <a:endParaRPr lang="en-US" sz="1100">
+                      <a:endParaRPr lang="en-US" sz="1200">
                         <a:effectLst/>
-                        <a:latin typeface="Calibri" panose="020F0502020204030204" pitchFamily="34" charset="0"/>
+                        <a:latin typeface="Times New Roman" panose="02020603050405020304" pitchFamily="18" charset="0"/>
                         <a:ea typeface="Calibri" panose="020F0502020204030204" pitchFamily="34" charset="0"/>
                         <a:cs typeface="Times New Roman" panose="02020603050405020304" pitchFamily="18" charset="0"/>
                       </a:endParaRPr>
@@ -16518,38 +16873,48 @@
                         </a:spcAft>
                       </a:pPr>
                       <a:r>
-                        <a:rPr lang="fr-FR" sz="1100" dirty="0">
+                        <a:rPr lang="fr-FR" sz="1200" dirty="0">
                           <a:effectLst/>
+                          <a:latin typeface="Times New Roman" panose="02020603050405020304" pitchFamily="18" charset="0"/>
+                          <a:cs typeface="Times New Roman" panose="02020603050405020304" pitchFamily="18" charset="0"/>
                         </a:rPr>
                         <a:t>Un fichier de données structuré est créé et disponible pour être ouvert par des outils tiers (ex: </a:t>
                       </a:r>
                       <a:r>
-                        <a:rPr lang="fr-FR" sz="1100" dirty="0" err="1">
+                        <a:rPr lang="fr-FR" sz="1200" dirty="0" err="1">
                           <a:effectLst/>
+                          <a:latin typeface="Times New Roman" panose="02020603050405020304" pitchFamily="18" charset="0"/>
+                          <a:cs typeface="Times New Roman" panose="02020603050405020304" pitchFamily="18" charset="0"/>
                         </a:rPr>
                         <a:t>LibreOffice</a:t>
                       </a:r>
                       <a:r>
-                        <a:rPr lang="fr-FR" sz="1100" dirty="0">
+                        <a:rPr lang="fr-FR" sz="1200" dirty="0">
                           <a:effectLst/>
+                          <a:latin typeface="Times New Roman" panose="02020603050405020304" pitchFamily="18" charset="0"/>
+                          <a:cs typeface="Times New Roman" panose="02020603050405020304" pitchFamily="18" charset="0"/>
                         </a:rPr>
                         <a:t> </a:t>
                       </a:r>
                       <a:r>
-                        <a:rPr lang="fr-FR" sz="1100" dirty="0" err="1">
+                        <a:rPr lang="fr-FR" sz="1200" dirty="0" err="1">
                           <a:effectLst/>
+                          <a:latin typeface="Times New Roman" panose="02020603050405020304" pitchFamily="18" charset="0"/>
+                          <a:cs typeface="Times New Roman" panose="02020603050405020304" pitchFamily="18" charset="0"/>
                         </a:rPr>
                         <a:t>Calc</a:t>
                       </a:r>
                       <a:r>
-                        <a:rPr lang="fr-FR" sz="1100" dirty="0">
+                        <a:rPr lang="fr-FR" sz="1200" dirty="0">
                           <a:effectLst/>
+                          <a:latin typeface="Times New Roman" panose="02020603050405020304" pitchFamily="18" charset="0"/>
+                          <a:cs typeface="Times New Roman" panose="02020603050405020304" pitchFamily="18" charset="0"/>
                         </a:rPr>
                         <a:t>).</a:t>
                       </a:r>
-                      <a:endParaRPr lang="en-US" sz="1100" dirty="0">
+                      <a:endParaRPr lang="en-US" sz="1200" dirty="0">
                         <a:effectLst/>
-                        <a:latin typeface="Calibri" panose="020F0502020204030204" pitchFamily="34" charset="0"/>
+                        <a:latin typeface="Times New Roman" panose="02020603050405020304" pitchFamily="18" charset="0"/>
                         <a:ea typeface="Calibri" panose="020F0502020204030204" pitchFamily="34" charset="0"/>
                         <a:cs typeface="Times New Roman" panose="02020603050405020304" pitchFamily="18" charset="0"/>
                       </a:endParaRPr>
@@ -16614,7 +16979,7 @@
         </p:nvSpPr>
         <p:spPr>
           <a:xfrm>
-            <a:off x="1475047" y="1640840"/>
+            <a:off x="1465620" y="2460972"/>
             <a:ext cx="9087168" cy="800100"/>
           </a:xfrm>
           <a:prstGeom prst="rect">
@@ -16658,10 +17023,18 @@
               </a:lnSpc>
             </a:pPr>
             <a:r>
-              <a:rPr lang="en-US" sz="4400" dirty="0" smtClean="0"/>
+              <a:rPr lang="en-US" sz="4400" dirty="0" smtClean="0">
+                <a:effectLst/>
+                <a:latin typeface="Times New Roman" panose="02020603050405020304" pitchFamily="18" charset="0"/>
+                <a:cs typeface="Times New Roman" panose="02020603050405020304" pitchFamily="18" charset="0"/>
+              </a:rPr>
               <a:t>v. MODELISATION UML </a:t>
             </a:r>
-            <a:endParaRPr lang="fr-FR" sz="4400" dirty="0"/>
+            <a:endParaRPr lang="fr-FR" sz="4400" dirty="0">
+              <a:effectLst/>
+              <a:latin typeface="Times New Roman" panose="02020603050405020304" pitchFamily="18" charset="0"/>
+              <a:cs typeface="Times New Roman" panose="02020603050405020304" pitchFamily="18" charset="0"/>
+            </a:endParaRPr>
           </a:p>
         </p:txBody>
       </p:sp>
@@ -17059,10 +17432,30 @@
           <a:lstStyle/>
           <a:p>
             <a:r>
-              <a:rPr lang="fr-FR" dirty="0" smtClean="0"/>
-              <a:t>Dossier d’analyse</a:t>
-            </a:r>
-            <a:endParaRPr lang="fr-FR" dirty="0"/>
+              <a:rPr lang="fr-FR" b="1" dirty="0" smtClean="0">
+                <a:latin typeface="Times New Roman" panose="02020603050405020304" pitchFamily="18" charset="0"/>
+                <a:cs typeface="Times New Roman" panose="02020603050405020304" pitchFamily="18" charset="0"/>
+              </a:rPr>
+              <a:t>Dossier</a:t>
+            </a:r>
+            <a:r>
+              <a:rPr lang="fr-FR" dirty="0" smtClean="0">
+                <a:latin typeface="Times New Roman" panose="02020603050405020304" pitchFamily="18" charset="0"/>
+                <a:cs typeface="Times New Roman" panose="02020603050405020304" pitchFamily="18" charset="0"/>
+              </a:rPr>
+              <a:t> </a:t>
+            </a:r>
+            <a:r>
+              <a:rPr lang="fr-FR" b="1" dirty="0" smtClean="0">
+                <a:latin typeface="Times New Roman" panose="02020603050405020304" pitchFamily="18" charset="0"/>
+                <a:cs typeface="Times New Roman" panose="02020603050405020304" pitchFamily="18" charset="0"/>
+              </a:rPr>
+              <a:t>d’analyse</a:t>
+            </a:r>
+            <a:endParaRPr lang="fr-FR" b="1" dirty="0">
+              <a:latin typeface="Times New Roman" panose="02020603050405020304" pitchFamily="18" charset="0"/>
+              <a:cs typeface="Times New Roman" panose="02020603050405020304" pitchFamily="18" charset="0"/>
+            </a:endParaRPr>
           </a:p>
         </p:txBody>
       </p:sp>
@@ -17747,10 +18140,18 @@
           </a:lstStyle>
           <a:p>
             <a:r>
-              <a:rPr lang="fr-FR" sz="3200" dirty="0" smtClean="0"/>
+              <a:rPr lang="fr-FR" sz="3200" dirty="0" smtClean="0">
+                <a:effectLst/>
+                <a:latin typeface="Times New Roman" panose="02020603050405020304" pitchFamily="18" charset="0"/>
+                <a:cs typeface="Times New Roman" panose="02020603050405020304" pitchFamily="18" charset="0"/>
+              </a:rPr>
               <a:t>CONCLUSION</a:t>
             </a:r>
-            <a:endParaRPr lang="fr-FR" sz="3200" dirty="0"/>
+            <a:endParaRPr lang="fr-FR" sz="3200" dirty="0">
+              <a:effectLst/>
+              <a:latin typeface="Times New Roman" panose="02020603050405020304" pitchFamily="18" charset="0"/>
+              <a:cs typeface="Times New Roman" panose="02020603050405020304" pitchFamily="18" charset="0"/>
+            </a:endParaRPr>
           </a:p>
         </p:txBody>
       </p:sp>
@@ -18258,7 +18659,10 @@
           <a:lstStyle/>
           <a:p>
             <a:r>
-              <a:rPr lang="en-US" sz="4800" u="sng" dirty="0" smtClean="0"/>
+              <a:rPr lang="en-US" sz="4800" b="1" u="sng" dirty="0" smtClean="0">
+                <a:latin typeface="Times New Roman" panose="02020603050405020304" pitchFamily="18" charset="0"/>
+                <a:cs typeface="Times New Roman" panose="02020603050405020304" pitchFamily="18" charset="0"/>
+              </a:rPr>
               <a:t>SOMMAIRE</a:t>
             </a:r>
             <a:r>
@@ -19235,10 +19639,16 @@
           <a:lstStyle/>
           <a:p>
             <a:r>
-              <a:rPr lang="en-US" sz="4400" dirty="0" smtClean="0"/>
+              <a:rPr lang="en-US" sz="4400" b="1" dirty="0" smtClean="0">
+                <a:latin typeface="Times New Roman" panose="02020603050405020304" pitchFamily="18" charset="0"/>
+                <a:cs typeface="Times New Roman" panose="02020603050405020304" pitchFamily="18" charset="0"/>
+              </a:rPr>
               <a:t>INTRODUCTION</a:t>
             </a:r>
-            <a:endParaRPr lang="fr-FR" sz="4400" dirty="0"/>
+            <a:endParaRPr lang="fr-FR" sz="4400" b="1" dirty="0">
+              <a:latin typeface="Times New Roman" panose="02020603050405020304" pitchFamily="18" charset="0"/>
+              <a:cs typeface="Times New Roman" panose="02020603050405020304" pitchFamily="18" charset="0"/>
+            </a:endParaRPr>
           </a:p>
         </p:txBody>
       </p:sp>
@@ -19251,7 +19661,7 @@
         <p:spPr>
           <a:xfrm>
             <a:off x="629920" y="889844"/>
-            <a:ext cx="10810240" cy="4193199"/>
+            <a:ext cx="10810240" cy="3782061"/>
           </a:xfrm>
           <a:prstGeom prst="rect">
             <a:avLst/>
@@ -19269,58 +19679,100 @@
               </a:lnSpc>
             </a:pPr>
             <a:r>
-              <a:rPr lang="fr-FR" dirty="0" smtClean="0"/>
+              <a:rPr lang="fr-FR" dirty="0" smtClean="0">
+                <a:latin typeface="Times New Roman" panose="02020603050405020304" pitchFamily="18" charset="0"/>
+                <a:cs typeface="Times New Roman" panose="02020603050405020304" pitchFamily="18" charset="0"/>
+              </a:rPr>
               <a:t>	Ce </a:t>
             </a:r>
             <a:r>
-              <a:rPr lang="fr-FR" dirty="0"/>
+              <a:rPr lang="fr-FR" dirty="0">
+                <a:latin typeface="Times New Roman" panose="02020603050405020304" pitchFamily="18" charset="0"/>
+                <a:cs typeface="Times New Roman" panose="02020603050405020304" pitchFamily="18" charset="0"/>
+              </a:rPr>
               <a:t>dossier d'analyse s'inscrit dans la continuité directe du cahier des charges dont il constitue la déclinaison technique et structurelle </a:t>
             </a:r>
             <a:r>
-              <a:rPr lang="fr-FR" dirty="0" smtClean="0"/>
+              <a:rPr lang="fr-FR" dirty="0" smtClean="0">
+                <a:latin typeface="Times New Roman" panose="02020603050405020304" pitchFamily="18" charset="0"/>
+                <a:cs typeface="Times New Roman" panose="02020603050405020304" pitchFamily="18" charset="0"/>
+              </a:rPr>
               <a:t>pour notre projet. </a:t>
             </a:r>
             <a:r>
-              <a:rPr lang="fr-FR" dirty="0"/>
+              <a:rPr lang="fr-FR" dirty="0">
+                <a:latin typeface="Times New Roman" panose="02020603050405020304" pitchFamily="18" charset="0"/>
+                <a:cs typeface="Times New Roman" panose="02020603050405020304" pitchFamily="18" charset="0"/>
+              </a:rPr>
               <a:t>Alors que le document précédent identifiait les besoins en surveillance de performance pour l'environnement </a:t>
             </a:r>
             <a:r>
-              <a:rPr lang="fr-FR" b="1" dirty="0"/>
+              <a:rPr lang="fr-FR" b="1" dirty="0">
+                <a:latin typeface="Times New Roman" panose="02020603050405020304" pitchFamily="18" charset="0"/>
+                <a:cs typeface="Times New Roman" panose="02020603050405020304" pitchFamily="18" charset="0"/>
+              </a:rPr>
               <a:t>Linux </a:t>
             </a:r>
             <a:r>
-              <a:rPr lang="fr-FR" b="1" dirty="0" err="1"/>
+              <a:rPr lang="fr-FR" b="1" dirty="0" err="1">
+                <a:latin typeface="Times New Roman" panose="02020603050405020304" pitchFamily="18" charset="0"/>
+                <a:cs typeface="Times New Roman" panose="02020603050405020304" pitchFamily="18" charset="0"/>
+              </a:rPr>
               <a:t>openSUSE</a:t>
             </a:r>
             <a:r>
-              <a:rPr lang="fr-FR" dirty="0"/>
+              <a:rPr lang="fr-FR" dirty="0">
+                <a:latin typeface="Times New Roman" panose="02020603050405020304" pitchFamily="18" charset="0"/>
+                <a:cs typeface="Times New Roman" panose="02020603050405020304" pitchFamily="18" charset="0"/>
+              </a:rPr>
               <a:t>, le présent dossier a pour objectif de traduire ces exigences fonctionnelles en une architecture logicielle concrète. En s’appuyant sur une modélisation rigoureuse via le langage </a:t>
             </a:r>
             <a:r>
-              <a:rPr lang="fr-FR" b="1" dirty="0"/>
+              <a:rPr lang="fr-FR" b="1" dirty="0">
+                <a:latin typeface="Times New Roman" panose="02020603050405020304" pitchFamily="18" charset="0"/>
+                <a:cs typeface="Times New Roman" panose="02020603050405020304" pitchFamily="18" charset="0"/>
+              </a:rPr>
               <a:t>UML</a:t>
             </a:r>
             <a:r>
-              <a:rPr lang="fr-FR" dirty="0"/>
+              <a:rPr lang="fr-FR" dirty="0">
+                <a:latin typeface="Times New Roman" panose="02020603050405020304" pitchFamily="18" charset="0"/>
+                <a:cs typeface="Times New Roman" panose="02020603050405020304" pitchFamily="18" charset="0"/>
+              </a:rPr>
               <a:t>, nous détaillons ici la conception des mécanismes de capture en temps réel des métriques CPU, tout en respectant les contraintes de performance et de précision imposées par le cahier des charges. Cette phase d'analyse permet de figer la logique interne du moniteur </a:t>
             </a:r>
             <a:r>
-              <a:rPr lang="fr-FR" dirty="0" smtClean="0"/>
+              <a:rPr lang="fr-FR" dirty="0" smtClean="0">
+                <a:latin typeface="Times New Roman" panose="02020603050405020304" pitchFamily="18" charset="0"/>
+                <a:cs typeface="Times New Roman" panose="02020603050405020304" pitchFamily="18" charset="0"/>
+              </a:rPr>
               <a:t>de </a:t>
             </a:r>
             <a:r>
-              <a:rPr lang="fr-FR" dirty="0"/>
+              <a:rPr lang="fr-FR" dirty="0">
+                <a:latin typeface="Times New Roman" panose="02020603050405020304" pitchFamily="18" charset="0"/>
+                <a:cs typeface="Times New Roman" panose="02020603050405020304" pitchFamily="18" charset="0"/>
+              </a:rPr>
               <a:t>l'extraction des données brutes depuis les interfaces du noyau Linux jusqu'à leur représentation visuelle </a:t>
             </a:r>
             <a:r>
-              <a:rPr lang="fr-FR" dirty="0" smtClean="0"/>
+              <a:rPr lang="fr-FR" dirty="0" smtClean="0">
+                <a:latin typeface="Times New Roman" panose="02020603050405020304" pitchFamily="18" charset="0"/>
+                <a:cs typeface="Times New Roman" panose="02020603050405020304" pitchFamily="18" charset="0"/>
+              </a:rPr>
               <a:t>garantissant </a:t>
             </a:r>
             <a:r>
-              <a:rPr lang="fr-FR" dirty="0"/>
+              <a:rPr lang="fr-FR" dirty="0">
+                <a:latin typeface="Times New Roman" panose="02020603050405020304" pitchFamily="18" charset="0"/>
+                <a:cs typeface="Times New Roman" panose="02020603050405020304" pitchFamily="18" charset="0"/>
+              </a:rPr>
               <a:t>ainsi une mise en œuvre cohérente et optimisée pour les architectures multiprocesseurs.</a:t>
             </a:r>
-            <a:endParaRPr lang="fr-CM" dirty="0"/>
+            <a:endParaRPr lang="fr-CM" dirty="0">
+              <a:latin typeface="Times New Roman" panose="02020603050405020304" pitchFamily="18" charset="0"/>
+              <a:cs typeface="Times New Roman" panose="02020603050405020304" pitchFamily="18" charset="0"/>
+            </a:endParaRPr>
           </a:p>
         </p:txBody>
       </p:sp>
@@ -19718,18 +20170,30 @@
           <a:lstStyle/>
           <a:p>
             <a:r>
-              <a:rPr lang="en-US" sz="4000" dirty="0" smtClean="0"/>
+              <a:rPr lang="en-US" sz="4000" b="1" dirty="0" smtClean="0">
+                <a:latin typeface="Times New Roman" panose="02020603050405020304" pitchFamily="18" charset="0"/>
+                <a:cs typeface="Times New Roman" panose="02020603050405020304" pitchFamily="18" charset="0"/>
+              </a:rPr>
               <a:t>I. </a:t>
             </a:r>
             <a:r>
-              <a:rPr lang="en-US" sz="4000" dirty="0" err="1" smtClean="0"/>
+              <a:rPr lang="en-US" sz="4000" b="1" dirty="0" err="1" smtClean="0">
+                <a:latin typeface="Times New Roman" panose="02020603050405020304" pitchFamily="18" charset="0"/>
+                <a:cs typeface="Times New Roman" panose="02020603050405020304" pitchFamily="18" charset="0"/>
+              </a:rPr>
               <a:t>Contexte</a:t>
             </a:r>
             <a:r>
-              <a:rPr lang="en-US" sz="4000" dirty="0" smtClean="0"/>
+              <a:rPr lang="en-US" sz="4000" b="1" dirty="0" smtClean="0">
+                <a:latin typeface="Times New Roman" panose="02020603050405020304" pitchFamily="18" charset="0"/>
+                <a:cs typeface="Times New Roman" panose="02020603050405020304" pitchFamily="18" charset="0"/>
+              </a:rPr>
               <a:t> ET OBJECTIFS</a:t>
             </a:r>
-            <a:endParaRPr lang="fr-FR" sz="4000" dirty="0"/>
+            <a:endParaRPr lang="fr-FR" sz="4000" b="1" dirty="0">
+              <a:latin typeface="Times New Roman" panose="02020603050405020304" pitchFamily="18" charset="0"/>
+              <a:cs typeface="Times New Roman" panose="02020603050405020304" pitchFamily="18" charset="0"/>
+            </a:endParaRPr>
           </a:p>
         </p:txBody>
       </p:sp>
@@ -19781,8 +20245,8 @@
         </p:nvSpPr>
         <p:spPr bwMode="auto">
           <a:xfrm>
-            <a:off x="619760" y="2262622"/>
-            <a:ext cx="10797853" cy="2400657"/>
+            <a:off x="619760" y="2290290"/>
+            <a:ext cx="10797853" cy="2345322"/>
           </a:xfrm>
           <a:prstGeom prst="rect">
             <a:avLst/>
@@ -19843,52 +20307,86 @@
             </a:pPr>
             <a:r>
               <a:rPr lang="en-US" altLang="en-US" sz="1600" dirty="0" smtClean="0">
-                <a:latin typeface="Arial" panose="020B0604020202020204" pitchFamily="34" charset="0"/>
+                <a:latin typeface="Times New Roman" panose="02020603050405020304" pitchFamily="18" charset="0"/>
+                <a:cs typeface="Times New Roman" panose="02020603050405020304" pitchFamily="18" charset="0"/>
               </a:rPr>
               <a:t>	</a:t>
             </a:r>
             <a:r>
-              <a:rPr lang="fr-FR" sz="2000" dirty="0"/>
+              <a:rPr lang="fr-FR" sz="2000" dirty="0">
+                <a:latin typeface="Times New Roman" panose="02020603050405020304" pitchFamily="18" charset="0"/>
+                <a:cs typeface="Times New Roman" panose="02020603050405020304" pitchFamily="18" charset="0"/>
+              </a:rPr>
               <a:t>Le projet </a:t>
             </a:r>
             <a:r>
-              <a:rPr lang="fr-FR" sz="2000" b="1" dirty="0" err="1"/>
+              <a:rPr lang="fr-FR" sz="2000" b="1" dirty="0" err="1">
+                <a:latin typeface="Times New Roman" panose="02020603050405020304" pitchFamily="18" charset="0"/>
+                <a:cs typeface="Times New Roman" panose="02020603050405020304" pitchFamily="18" charset="0"/>
+              </a:rPr>
               <a:t>Multicore</a:t>
             </a:r>
             <a:r>
-              <a:rPr lang="fr-FR" sz="2000" b="1" dirty="0"/>
+              <a:rPr lang="fr-FR" sz="2000" b="1" dirty="0">
+                <a:latin typeface="Times New Roman" panose="02020603050405020304" pitchFamily="18" charset="0"/>
+                <a:cs typeface="Times New Roman" panose="02020603050405020304" pitchFamily="18" charset="0"/>
+              </a:rPr>
               <a:t> Monitor</a:t>
             </a:r>
             <a:r>
-              <a:rPr lang="fr-FR" sz="2000" dirty="0"/>
+              <a:rPr lang="fr-FR" sz="2000" dirty="0">
+                <a:latin typeface="Times New Roman" panose="02020603050405020304" pitchFamily="18" charset="0"/>
+                <a:cs typeface="Times New Roman" panose="02020603050405020304" pitchFamily="18" charset="0"/>
+              </a:rPr>
               <a:t> émerge dans un contexte technologique où la virtualisation, le calcul intensif (HPC) et la conteneurisation sollicitent les processeurs de manière hétérogène. Sous </a:t>
             </a:r>
             <a:r>
-              <a:rPr lang="fr-FR" sz="2000" b="1" dirty="0"/>
+              <a:rPr lang="fr-FR" sz="2000" b="1" dirty="0">
+                <a:latin typeface="Times New Roman" panose="02020603050405020304" pitchFamily="18" charset="0"/>
+                <a:cs typeface="Times New Roman" panose="02020603050405020304" pitchFamily="18" charset="0"/>
+              </a:rPr>
               <a:t>Linux </a:t>
             </a:r>
             <a:r>
-              <a:rPr lang="fr-FR" sz="2000" b="1" dirty="0" err="1"/>
+              <a:rPr lang="fr-FR" sz="2000" b="1" dirty="0" err="1">
+                <a:latin typeface="Times New Roman" panose="02020603050405020304" pitchFamily="18" charset="0"/>
+                <a:cs typeface="Times New Roman" panose="02020603050405020304" pitchFamily="18" charset="0"/>
+              </a:rPr>
               <a:t>openSUSE</a:t>
             </a:r>
             <a:r>
-              <a:rPr lang="fr-FR" sz="2000" dirty="0"/>
+              <a:rPr lang="fr-FR" sz="2000" dirty="0">
+                <a:latin typeface="Times New Roman" panose="02020603050405020304" pitchFamily="18" charset="0"/>
+                <a:cs typeface="Times New Roman" panose="02020603050405020304" pitchFamily="18" charset="0"/>
+              </a:rPr>
               <a:t>, bien que des outils comme </a:t>
             </a:r>
             <a:r>
-              <a:rPr lang="fr-FR" sz="2000" i="1" dirty="0"/>
+              <a:rPr lang="fr-FR" sz="2000" i="1" dirty="0">
+                <a:latin typeface="Times New Roman" panose="02020603050405020304" pitchFamily="18" charset="0"/>
+                <a:cs typeface="Times New Roman" panose="02020603050405020304" pitchFamily="18" charset="0"/>
+              </a:rPr>
               <a:t>top</a:t>
             </a:r>
             <a:r>
-              <a:rPr lang="fr-FR" sz="2000" dirty="0"/>
+              <a:rPr lang="fr-FR" sz="2000" dirty="0">
+                <a:latin typeface="Times New Roman" panose="02020603050405020304" pitchFamily="18" charset="0"/>
+                <a:cs typeface="Times New Roman" panose="02020603050405020304" pitchFamily="18" charset="0"/>
+              </a:rPr>
               <a:t> ou </a:t>
             </a:r>
             <a:r>
-              <a:rPr lang="fr-FR" sz="2000" i="1" dirty="0" err="1"/>
+              <a:rPr lang="fr-FR" sz="2000" i="1" dirty="0" err="1">
+                <a:latin typeface="Times New Roman" panose="02020603050405020304" pitchFamily="18" charset="0"/>
+                <a:cs typeface="Times New Roman" panose="02020603050405020304" pitchFamily="18" charset="0"/>
+              </a:rPr>
               <a:t>htop</a:t>
             </a:r>
             <a:r>
-              <a:rPr lang="fr-FR" sz="2000" dirty="0"/>
+              <a:rPr lang="fr-FR" sz="2000" dirty="0">
+                <a:latin typeface="Times New Roman" panose="02020603050405020304" pitchFamily="18" charset="0"/>
+                <a:cs typeface="Times New Roman" panose="02020603050405020304" pitchFamily="18" charset="0"/>
+              </a:rPr>
               <a:t> existent, il devient nécessaire de concevoir une solution dédiée capable d'isoler finement le comportement de chaque cœur physique et logique pour optimiser le rendement système.</a:t>
             </a:r>
             <a:endParaRPr kumimoji="0" lang="en-US" altLang="en-US" sz="1800" b="0" i="0" u="none" strike="noStrike" cap="none" normalizeH="0" baseline="0" dirty="0" smtClean="0">
@@ -19899,7 +20397,8 @@
                 <a:schemeClr val="tx1"/>
               </a:solidFill>
               <a:effectLst/>
-              <a:latin typeface="Arial" panose="020B0604020202020204" pitchFamily="34" charset="0"/>
+              <a:latin typeface="Times New Roman" panose="02020603050405020304" pitchFamily="18" charset="0"/>
+              <a:cs typeface="Times New Roman" panose="02020603050405020304" pitchFamily="18" charset="0"/>
             </a:endParaRPr>
           </a:p>
         </p:txBody>
@@ -19927,10 +20426,16 @@
           <a:lstStyle/>
           <a:p>
             <a:r>
-              <a:rPr lang="fr-CM" sz="3600" b="1" dirty="0" smtClean="0"/>
+              <a:rPr lang="fr-CM" sz="3600" b="1" dirty="0" smtClean="0">
+                <a:latin typeface="Times New Roman" panose="02020603050405020304" pitchFamily="18" charset="0"/>
+                <a:cs typeface="Times New Roman" panose="02020603050405020304" pitchFamily="18" charset="0"/>
+              </a:rPr>
               <a:t>1. Contexte</a:t>
             </a:r>
-            <a:endParaRPr lang="fr-CM" sz="3600" b="1" dirty="0"/>
+            <a:endParaRPr lang="fr-CM" sz="3600" b="1" dirty="0">
+              <a:latin typeface="Times New Roman" panose="02020603050405020304" pitchFamily="18" charset="0"/>
+              <a:cs typeface="Times New Roman" panose="02020603050405020304" pitchFamily="18" charset="0"/>
+            </a:endParaRPr>
           </a:p>
         </p:txBody>
       </p:sp>
@@ -20470,14 +20975,23 @@
           <a:lstStyle/>
           <a:p>
             <a:r>
-              <a:rPr lang="fr-CM" sz="3600" b="1" dirty="0"/>
+              <a:rPr lang="fr-CM" sz="3600" dirty="0">
+                <a:latin typeface="Times New Roman" panose="02020603050405020304" pitchFamily="18" charset="0"/>
+                <a:cs typeface="Times New Roman" panose="02020603050405020304" pitchFamily="18" charset="0"/>
+              </a:rPr>
               <a:t>2</a:t>
             </a:r>
             <a:r>
-              <a:rPr lang="fr-CM" sz="3600" b="1" dirty="0" smtClean="0"/>
+              <a:rPr lang="fr-CM" sz="3600" dirty="0" smtClean="0">
+                <a:latin typeface="Times New Roman" panose="02020603050405020304" pitchFamily="18" charset="0"/>
+                <a:cs typeface="Times New Roman" panose="02020603050405020304" pitchFamily="18" charset="0"/>
+              </a:rPr>
               <a:t>. Objectifs</a:t>
             </a:r>
-            <a:endParaRPr lang="fr-CM" sz="3600" b="1" dirty="0"/>
+            <a:endParaRPr lang="fr-CM" sz="3600" dirty="0">
+              <a:latin typeface="Times New Roman" panose="02020603050405020304" pitchFamily="18" charset="0"/>
+              <a:cs typeface="Times New Roman" panose="02020603050405020304" pitchFamily="18" charset="0"/>
+            </a:endParaRPr>
           </a:p>
         </p:txBody>
       </p:sp>
@@ -20491,8 +21005,8 @@
         </p:nvSpPr>
         <p:spPr bwMode="auto">
           <a:xfrm>
-            <a:off x="487680" y="1269066"/>
-            <a:ext cx="11431051" cy="4708981"/>
+            <a:off x="487680" y="1296894"/>
+            <a:ext cx="11431051" cy="4653325"/>
           </a:xfrm>
           <a:prstGeom prst="rect">
             <a:avLst/>
@@ -20730,7 +21244,7 @@
               <a:tabLst/>
             </a:pPr>
             <a:r>
-              <a:rPr kumimoji="0" lang="en-US" altLang="en-US" sz="2000" b="1" i="0" u="none" strike="noStrike" cap="none" normalizeH="0" baseline="0" dirty="0" err="1" smtClean="0">
+              <a:rPr kumimoji="0" lang="en-US" altLang="en-US" sz="2000" i="0" u="none" strike="noStrike" cap="none" normalizeH="0" baseline="0" dirty="0" err="1" smtClean="0">
                 <a:ln>
                   <a:noFill/>
                 </a:ln>
@@ -20744,7 +21258,7 @@
               <a:t>Précision</a:t>
             </a:r>
             <a:r>
-              <a:rPr kumimoji="0" lang="en-US" altLang="en-US" sz="2000" b="1" i="0" u="none" strike="noStrike" cap="none" normalizeH="0" baseline="0" dirty="0" smtClean="0">
+              <a:rPr kumimoji="0" lang="en-US" altLang="en-US" sz="2000" i="0" u="none" strike="noStrike" cap="none" normalizeH="0" baseline="0" dirty="0" smtClean="0">
                 <a:ln>
                   <a:noFill/>
                 </a:ln>
@@ -20758,7 +21272,7 @@
               <a:t> </a:t>
             </a:r>
             <a:r>
-              <a:rPr kumimoji="0" lang="en-US" altLang="en-US" sz="2000" b="1" i="0" u="none" strike="noStrike" cap="none" normalizeH="0" baseline="0" dirty="0" err="1" smtClean="0">
+              <a:rPr kumimoji="0" lang="en-US" altLang="en-US" sz="2000" i="0" u="none" strike="noStrike" cap="none" normalizeH="0" baseline="0" dirty="0" err="1" smtClean="0">
                 <a:ln>
                   <a:noFill/>
                 </a:ln>
@@ -20772,7 +21286,7 @@
               <a:t>temporelle</a:t>
             </a:r>
             <a:r>
-              <a:rPr kumimoji="0" lang="en-US" altLang="en-US" sz="2000" b="1" i="0" u="none" strike="noStrike" cap="none" normalizeH="0" baseline="0" dirty="0" smtClean="0">
+              <a:rPr kumimoji="0" lang="en-US" altLang="en-US" sz="2000" i="0" u="none" strike="noStrike" cap="none" normalizeH="0" baseline="0" dirty="0" smtClean="0">
                 <a:ln>
                   <a:noFill/>
                 </a:ln>
@@ -21112,7 +21626,7 @@
               <a:tabLst/>
             </a:pPr>
             <a:r>
-              <a:rPr kumimoji="0" lang="en-US" altLang="en-US" sz="2000" b="1" i="0" u="none" strike="noStrike" cap="none" normalizeH="0" baseline="0" dirty="0" err="1" smtClean="0">
+              <a:rPr kumimoji="0" lang="en-US" altLang="en-US" sz="2000" i="0" u="none" strike="noStrike" cap="none" normalizeH="0" baseline="0" dirty="0" err="1" smtClean="0">
                 <a:ln>
                   <a:noFill/>
                 </a:ln>
@@ -21126,7 +21640,7 @@
               <a:t>Granularité</a:t>
             </a:r>
             <a:r>
-              <a:rPr kumimoji="0" lang="en-US" altLang="en-US" sz="2000" b="1" i="0" u="none" strike="noStrike" cap="none" normalizeH="0" baseline="0" dirty="0" smtClean="0">
+              <a:rPr kumimoji="0" lang="en-US" altLang="en-US" sz="2000" i="0" u="none" strike="noStrike" cap="none" normalizeH="0" baseline="0" dirty="0" smtClean="0">
                 <a:ln>
                   <a:noFill/>
                 </a:ln>
@@ -21140,7 +21654,7 @@
               <a:t> des </a:t>
             </a:r>
             <a:r>
-              <a:rPr kumimoji="0" lang="en-US" altLang="en-US" sz="2000" b="1" i="0" u="none" strike="noStrike" cap="none" normalizeH="0" baseline="0" dirty="0" err="1" smtClean="0">
+              <a:rPr kumimoji="0" lang="en-US" altLang="en-US" sz="2000" i="0" u="none" strike="noStrike" cap="none" normalizeH="0" baseline="0" dirty="0" err="1" smtClean="0">
                 <a:ln>
                   <a:noFill/>
                 </a:ln>
@@ -21154,7 +21668,7 @@
               <a:t>données</a:t>
             </a:r>
             <a:r>
-              <a:rPr kumimoji="0" lang="en-US" altLang="en-US" sz="2000" b="1" i="0" u="none" strike="noStrike" cap="none" normalizeH="0" baseline="0" dirty="0" smtClean="0">
+              <a:rPr kumimoji="0" lang="en-US" altLang="en-US" sz="2000" i="0" u="none" strike="noStrike" cap="none" normalizeH="0" baseline="0" dirty="0" smtClean="0">
                 <a:ln>
                   <a:noFill/>
                 </a:ln>
@@ -21438,7 +21952,7 @@
               <a:tabLst/>
             </a:pPr>
             <a:r>
-              <a:rPr kumimoji="0" lang="en-US" altLang="en-US" sz="2000" b="1" i="0" u="none" strike="noStrike" cap="none" normalizeH="0" baseline="0" dirty="0" err="1" smtClean="0">
+              <a:rPr kumimoji="0" lang="en-US" altLang="en-US" sz="2000" i="0" u="none" strike="noStrike" cap="none" normalizeH="0" baseline="0" dirty="0" err="1" smtClean="0">
                 <a:ln>
                   <a:noFill/>
                 </a:ln>
@@ -21452,7 +21966,7 @@
               <a:t>Interopérabilité</a:t>
             </a:r>
             <a:r>
-              <a:rPr kumimoji="0" lang="en-US" altLang="en-US" sz="2000" b="1" i="0" u="none" strike="noStrike" cap="none" normalizeH="0" baseline="0" dirty="0" smtClean="0">
+              <a:rPr kumimoji="0" lang="en-US" altLang="en-US" sz="2000" i="0" u="none" strike="noStrike" cap="none" normalizeH="0" baseline="0" dirty="0" smtClean="0">
                 <a:ln>
                   <a:noFill/>
                 </a:ln>
@@ -21466,7 +21980,7 @@
               <a:t> </a:t>
             </a:r>
             <a:r>
-              <a:rPr kumimoji="0" lang="en-US" altLang="en-US" sz="2000" b="1" i="0" u="none" strike="noStrike" cap="none" normalizeH="0" baseline="0" dirty="0" err="1" smtClean="0">
+              <a:rPr kumimoji="0" lang="en-US" altLang="en-US" sz="2000" i="0" u="none" strike="noStrike" cap="none" normalizeH="0" baseline="0" dirty="0" err="1" smtClean="0">
                 <a:ln>
                   <a:noFill/>
                 </a:ln>
@@ -21480,20 +21994,6 @@
               <a:t>système</a:t>
             </a:r>
             <a:r>
-              <a:rPr kumimoji="0" lang="en-US" altLang="en-US" sz="2000" b="1" i="0" u="none" strike="noStrike" cap="none" normalizeH="0" baseline="0" dirty="0" smtClean="0">
-                <a:ln>
-                  <a:noFill/>
-                </a:ln>
-                <a:solidFill>
-                  <a:schemeClr val="tx1"/>
-                </a:solidFill>
-                <a:effectLst/>
-                <a:latin typeface="Times New Roman" panose="02020603050405020304" pitchFamily="18" charset="0"/>
-                <a:cs typeface="Times New Roman" panose="02020603050405020304" pitchFamily="18" charset="0"/>
-              </a:rPr>
-              <a:t> : </a:t>
-            </a:r>
-            <a:r>
               <a:rPr kumimoji="0" lang="en-US" altLang="en-US" sz="2000" i="0" u="none" strike="noStrike" cap="none" normalizeH="0" baseline="0" dirty="0" smtClean="0">
                 <a:ln>
                   <a:noFill/>
@@ -21505,7 +22005,7 @@
                 <a:latin typeface="Times New Roman" panose="02020603050405020304" pitchFamily="18" charset="0"/>
                 <a:cs typeface="Times New Roman" panose="02020603050405020304" pitchFamily="18" charset="0"/>
               </a:rPr>
-              <a:t>Exploiter les </a:t>
+              <a:t> : Exploiter les </a:t>
             </a:r>
             <a:r>
               <a:rPr kumimoji="0" lang="en-US" altLang="en-US" sz="2000" i="0" u="none" strike="noStrike" cap="none" normalizeH="0" baseline="0" dirty="0" err="1" smtClean="0">
@@ -22331,7 +22831,8 @@
                 <a:schemeClr val="tx1"/>
               </a:solidFill>
               <a:effectLst/>
-              <a:latin typeface="Arial" panose="020B0604020202020204" pitchFamily="34" charset="0"/>
+              <a:latin typeface="Times New Roman" panose="02020603050405020304" pitchFamily="18" charset="0"/>
+              <a:cs typeface="Times New Roman" panose="02020603050405020304" pitchFamily="18" charset="0"/>
             </a:endParaRPr>
           </a:p>
         </p:txBody>
@@ -22406,14 +22907,23 @@
           <a:lstStyle/>
           <a:p>
             <a:r>
-              <a:rPr lang="fr-FR" dirty="0" smtClean="0"/>
+              <a:rPr lang="fr-FR" b="1" dirty="0" smtClean="0">
+                <a:latin typeface="Times New Roman" panose="02020603050405020304" pitchFamily="18" charset="0"/>
+                <a:cs typeface="Times New Roman" panose="02020603050405020304" pitchFamily="18" charset="0"/>
+              </a:rPr>
               <a:t>II</a:t>
             </a:r>
             <a:r>
-              <a:rPr lang="en-US" dirty="0" smtClean="0"/>
+              <a:rPr lang="en-US" b="1" dirty="0" smtClean="0">
+                <a:latin typeface="Times New Roman" panose="02020603050405020304" pitchFamily="18" charset="0"/>
+                <a:cs typeface="Times New Roman" panose="02020603050405020304" pitchFamily="18" charset="0"/>
+              </a:rPr>
               <a:t>. PERIMETRE FONCTIONNEL</a:t>
             </a:r>
-            <a:endParaRPr lang="fr-FR" dirty="0"/>
+            <a:endParaRPr lang="fr-FR" b="1" dirty="0">
+              <a:latin typeface="Times New Roman" panose="02020603050405020304" pitchFamily="18" charset="0"/>
+              <a:cs typeface="Times New Roman" panose="02020603050405020304" pitchFamily="18" charset="0"/>
+            </a:endParaRPr>
           </a:p>
         </p:txBody>
       </p:sp>
@@ -24640,14 +25150,26 @@
           </a:lstStyle>
           <a:p>
             <a:r>
-              <a:rPr lang="fr-FR" dirty="0" smtClean="0"/>
+              <a:rPr lang="fr-FR" dirty="0" smtClean="0">
+                <a:effectLst/>
+                <a:latin typeface="Times New Roman" panose="02020603050405020304" pitchFamily="18" charset="0"/>
+                <a:cs typeface="Times New Roman" panose="02020603050405020304" pitchFamily="18" charset="0"/>
+              </a:rPr>
               <a:t>II</a:t>
             </a:r>
             <a:r>
-              <a:rPr lang="en-US" dirty="0" smtClean="0"/>
+              <a:rPr lang="en-US" dirty="0" smtClean="0">
+                <a:effectLst/>
+                <a:latin typeface="Times New Roman" panose="02020603050405020304" pitchFamily="18" charset="0"/>
+                <a:cs typeface="Times New Roman" panose="02020603050405020304" pitchFamily="18" charset="0"/>
+              </a:rPr>
               <a:t>. PERIMETRE FONCTIONNEL</a:t>
             </a:r>
-            <a:endParaRPr lang="fr-FR" dirty="0"/>
+            <a:endParaRPr lang="fr-FR" dirty="0">
+              <a:effectLst/>
+              <a:latin typeface="Times New Roman" panose="02020603050405020304" pitchFamily="18" charset="0"/>
+              <a:cs typeface="Times New Roman" panose="02020603050405020304" pitchFamily="18" charset="0"/>
+            </a:endParaRPr>
           </a:p>
         </p:txBody>
       </p:sp>
@@ -24738,21 +25260,7 @@
                 <a:latin typeface="Times New Roman" panose="02020603050405020304" pitchFamily="18" charset="0"/>
                 <a:cs typeface="Times New Roman" panose="02020603050405020304" pitchFamily="18" charset="0"/>
               </a:rPr>
-              <a:t>3. Le Module </a:t>
-            </a:r>
-            <a:r>
-              <a:rPr kumimoji="0" lang="en-US" altLang="en-US" sz="2000" b="1" i="0" u="none" strike="noStrike" cap="none" normalizeH="0" baseline="0" dirty="0" smtClean="0">
-                <a:ln>
-                  <a:noFill/>
-                </a:ln>
-                <a:solidFill>
-                  <a:schemeClr val="tx1"/>
-                </a:solidFill>
-                <a:effectLst/>
-                <a:latin typeface="Times New Roman" panose="02020603050405020304" pitchFamily="18" charset="0"/>
-                <a:cs typeface="Times New Roman" panose="02020603050405020304" pitchFamily="18" charset="0"/>
-              </a:rPr>
-              <a:t>d 'Interface </a:t>
+              <a:t>3. Le Module d 'Interface </a:t>
             </a:r>
             <a:r>
               <a:rPr kumimoji="0" lang="en-US" altLang="en-US" sz="2000" b="1" i="0" u="none" strike="noStrike" cap="none" normalizeH="0" baseline="0" dirty="0" err="1" smtClean="0">
